--- a/projects/spanisch/kl07/sequenz-05-tiempo-libre/05b-verbos-er-ir/PPT-05b.pptx
+++ b/projects/spanisch/kl07/sequenz-05-tiempo-libre/05b-verbos-er-ir/PPT-05b.pptx
@@ -10,6 +10,15 @@
     <p:sldId id="258" r:id="rId9"/>
     <p:sldId id="259" r:id="rId10"/>
     <p:sldId id="260" r:id="rId11"/>
+    <p:sldId id="261" r:id="rId12"/>
+    <p:sldId id="262" r:id="rId13"/>
+    <p:sldId id="263" r:id="rId14"/>
+    <p:sldId id="264" r:id="rId15"/>
+    <p:sldId id="265" r:id="rId16"/>
+    <p:sldId id="266" r:id="rId17"/>
+    <p:sldId id="267" r:id="rId18"/>
+    <p:sldId id="268" r:id="rId19"/>
+    <p:sldId id="269" r:id="rId20"/>
   </p:sldIdLst>
   <p:sldSz cx="12191695" cy="6858000" type="screen4x3"/>
   <p:notesSz cx="6858000" cy="9144000"/>
@@ -3323,6 +3332,2840 @@
 </p:sld>
 </file>
 
+<file path=ppt/slides/slide10.xml><?xml version="1.0" encoding="utf-8"?>
+<p:sld xmlns:a="http://schemas.openxmlformats.org/drawingml/2006/main" xmlns:p="http://schemas.openxmlformats.org/presentationml/2006/main" xmlns:r="http://schemas.openxmlformats.org/officeDocument/2006/relationships">
+  <p:cSld>
+    <p:spTree>
+      <p:nvGrpSpPr>
+        <p:cNvPr id="1" name=""/>
+        <p:cNvGrpSpPr/>
+        <p:nvPr/>
+      </p:nvGrpSpPr>
+      <p:grpSpPr/>
+      <p:sp>
+        <p:nvSpPr>
+          <p:cNvPr id="2" name="Rectangle 1"/>
+          <p:cNvSpPr/>
+          <p:nvPr/>
+        </p:nvSpPr>
+        <p:spPr>
+          <a:xfrm>
+            <a:off x="0" y="0"/>
+            <a:ext cx="12191695" cy="457200"/>
+          </a:xfrm>
+          <a:prstGeom prst="rect">
+            <a:avLst/>
+          </a:prstGeom>
+          <a:solidFill>
+            <a:srgbClr val="C41E3A"/>
+          </a:solidFill>
+          <a:ln>
+            <a:noFill/>
+          </a:ln>
+        </p:spPr>
+        <p:style>
+          <a:lnRef idx="1">
+            <a:schemeClr val="accent1"/>
+          </a:lnRef>
+          <a:fillRef idx="3">
+            <a:schemeClr val="accent1"/>
+          </a:fillRef>
+          <a:effectRef idx="2">
+            <a:schemeClr val="accent1"/>
+          </a:effectRef>
+          <a:fontRef idx="minor">
+            <a:schemeClr val="lt1"/>
+          </a:fontRef>
+        </p:style>
+        <p:txBody>
+          <a:bodyPr rtlCol="0" anchor="ctr"/>
+          <a:lstStyle/>
+          <a:p>
+            <a:pPr algn="ctr"/>
+          </a:p>
+        </p:txBody>
+      </p:sp>
+      <p:sp>
+        <p:nvSpPr>
+          <p:cNvPr id="3" name="TextBox 2"/>
+          <p:cNvSpPr txBox="1"/>
+          <p:nvPr/>
+        </p:nvSpPr>
+        <p:spPr>
+          <a:xfrm>
+            <a:off x="274320" y="91440"/>
+            <a:ext cx="3657600" cy="274320"/>
+          </a:xfrm>
+          <a:prstGeom prst="rect">
+            <a:avLst/>
+          </a:prstGeom>
+          <a:noFill/>
+        </p:spPr>
+        <p:txBody>
+          <a:bodyPr wrap="none">
+            <a:spAutoFit/>
+          </a:bodyPr>
+          <a:lstStyle/>
+          <a:p>
+            <a:pPr algn="l">
+              <a:defRPr sz="1400" b="1">
+                <a:solidFill>
+                  <a:srgbClr val="FFFFFF"/>
+                </a:solidFill>
+                <a:latin typeface="Arial"/>
+              </a:defRPr>
+            </a:pPr>
+            <a:r>
+              <a:t>Spanisch Klasse 7 · LP-05b</a:t>
+            </a:r>
+          </a:p>
+        </p:txBody>
+      </p:sp>
+      <p:sp>
+        <p:nvSpPr>
+          <p:cNvPr id="4" name="Rectangle 3"/>
+          <p:cNvSpPr/>
+          <p:nvPr/>
+        </p:nvSpPr>
+        <p:spPr>
+          <a:xfrm>
+            <a:off x="0" y="6583680"/>
+            <a:ext cx="12191695" cy="274320"/>
+          </a:xfrm>
+          <a:prstGeom prst="rect">
+            <a:avLst/>
+          </a:prstGeom>
+          <a:solidFill>
+            <a:srgbClr val="F5F5F5"/>
+          </a:solidFill>
+          <a:ln>
+            <a:noFill/>
+          </a:ln>
+        </p:spPr>
+        <p:style>
+          <a:lnRef idx="1">
+            <a:schemeClr val="accent1"/>
+          </a:lnRef>
+          <a:fillRef idx="3">
+            <a:schemeClr val="accent1"/>
+          </a:fillRef>
+          <a:effectRef idx="2">
+            <a:schemeClr val="accent1"/>
+          </a:effectRef>
+          <a:fontRef idx="minor">
+            <a:schemeClr val="lt1"/>
+          </a:fontRef>
+        </p:style>
+        <p:txBody>
+          <a:bodyPr rtlCol="0" anchor="ctr"/>
+          <a:lstStyle/>
+          <a:p>
+            <a:pPr algn="ctr"/>
+          </a:p>
+        </p:txBody>
+      </p:sp>
+      <p:sp>
+        <p:nvSpPr>
+          <p:cNvPr id="5" name="TextBox 4"/>
+          <p:cNvSpPr txBox="1"/>
+          <p:nvPr/>
+        </p:nvSpPr>
+        <p:spPr>
+          <a:xfrm>
+            <a:off x="274320" y="6601968"/>
+            <a:ext cx="4572000" cy="228600"/>
+          </a:xfrm>
+          <a:prstGeom prst="rect">
+            <a:avLst/>
+          </a:prstGeom>
+          <a:noFill/>
+        </p:spPr>
+        <p:txBody>
+          <a:bodyPr wrap="none">
+            <a:spAutoFit/>
+          </a:bodyPr>
+          <a:lstStyle/>
+          <a:p>
+            <a:pPr algn="l">
+              <a:defRPr sz="1000" b="0">
+                <a:solidFill>
+                  <a:srgbClr val="555555"/>
+                </a:solidFill>
+                <a:latin typeface="Arial"/>
+              </a:defRPr>
+            </a:pPr>
+            <a:r>
+              <a:t>Verbos en -er/-ir</a:t>
+            </a:r>
+          </a:p>
+        </p:txBody>
+      </p:sp>
+      <p:sp>
+        <p:nvSpPr>
+          <p:cNvPr id="6" name="TextBox 5"/>
+          <p:cNvSpPr txBox="1"/>
+          <p:nvPr/>
+        </p:nvSpPr>
+        <p:spPr>
+          <a:xfrm>
+            <a:off x="9144000" y="6601968"/>
+            <a:ext cx="2743200" cy="228600"/>
+          </a:xfrm>
+          <a:prstGeom prst="rect">
+            <a:avLst/>
+          </a:prstGeom>
+          <a:noFill/>
+        </p:spPr>
+        <p:txBody>
+          <a:bodyPr wrap="none">
+            <a:spAutoFit/>
+          </a:bodyPr>
+          <a:lstStyle/>
+          <a:p>
+            <a:pPr algn="r">
+              <a:defRPr sz="1000" b="0">
+                <a:solidFill>
+                  <a:srgbClr val="555555"/>
+                </a:solidFill>
+                <a:latin typeface="Arial"/>
+              </a:defRPr>
+            </a:pPr>
+            <a:r>
+              <a:t>Sequenz 5</a:t>
+            </a:r>
+          </a:p>
+        </p:txBody>
+      </p:sp>
+      <p:sp>
+        <p:nvSpPr>
+          <p:cNvPr id="7" name="Rectangle 6"/>
+          <p:cNvSpPr/>
+          <p:nvPr/>
+        </p:nvSpPr>
+        <p:spPr>
+          <a:xfrm>
+            <a:off x="457200" y="640080"/>
+            <a:ext cx="1828800" cy="457200"/>
+          </a:xfrm>
+          <a:prstGeom prst="rect">
+            <a:avLst/>
+          </a:prstGeom>
+          <a:solidFill>
+            <a:srgbClr val="C41E3A"/>
+          </a:solidFill>
+          <a:ln>
+            <a:noFill/>
+          </a:ln>
+        </p:spPr>
+        <p:style>
+          <a:lnRef idx="1">
+            <a:schemeClr val="accent1"/>
+          </a:lnRef>
+          <a:fillRef idx="3">
+            <a:schemeClr val="accent1"/>
+          </a:fillRef>
+          <a:effectRef idx="2">
+            <a:schemeClr val="accent1"/>
+          </a:effectRef>
+          <a:fontRef idx="minor">
+            <a:schemeClr val="lt1"/>
+          </a:fontRef>
+        </p:style>
+        <p:txBody>
+          <a:bodyPr rtlCol="0" anchor="ctr"/>
+          <a:lstStyle/>
+          <a:p>
+            <a:pPr algn="ctr"/>
+          </a:p>
+        </p:txBody>
+      </p:sp>
+      <p:sp>
+        <p:nvSpPr>
+          <p:cNvPr id="8" name="TextBox 7"/>
+          <p:cNvSpPr txBox="1"/>
+          <p:nvPr/>
+        </p:nvSpPr>
+        <p:spPr>
+          <a:xfrm>
+            <a:off x="548640" y="713231"/>
+            <a:ext cx="1645920" cy="320040"/>
+          </a:xfrm>
+          <a:prstGeom prst="rect">
+            <a:avLst/>
+          </a:prstGeom>
+          <a:noFill/>
+        </p:spPr>
+        <p:txBody>
+          <a:bodyPr wrap="none">
+            <a:spAutoFit/>
+          </a:bodyPr>
+          <a:lstStyle/>
+          <a:p>
+            <a:pPr algn="ctr">
+              <a:defRPr sz="1400" b="1">
+                <a:solidFill>
+                  <a:srgbClr val="FFFFFF"/>
+                </a:solidFill>
+                <a:latin typeface="Arial"/>
+              </a:defRPr>
+            </a:pPr>
+            <a:r>
+              <a:t>ÜBUNG</a:t>
+            </a:r>
+          </a:p>
+        </p:txBody>
+      </p:sp>
+      <p:sp>
+        <p:nvSpPr>
+          <p:cNvPr id="9" name="TextBox 8"/>
+          <p:cNvSpPr txBox="1"/>
+          <p:nvPr/>
+        </p:nvSpPr>
+        <p:spPr>
+          <a:xfrm>
+            <a:off x="457200" y="1280160"/>
+            <a:ext cx="11274552" cy="731520"/>
+          </a:xfrm>
+          <a:prstGeom prst="rect">
+            <a:avLst/>
+          </a:prstGeom>
+          <a:noFill/>
+        </p:spPr>
+        <p:txBody>
+          <a:bodyPr wrap="none">
+            <a:spAutoFit/>
+          </a:bodyPr>
+          <a:lstStyle/>
+          <a:p>
+            <a:pPr algn="l">
+              <a:defRPr sz="3200" b="1">
+                <a:solidFill>
+                  <a:srgbClr val="C41E3A"/>
+                </a:solidFill>
+                <a:latin typeface="Arial"/>
+              </a:defRPr>
+            </a:pPr>
+            <a:r>
+              <a:t>✏️ Übung: -er konjugieren</a:t>
+            </a:r>
+          </a:p>
+        </p:txBody>
+      </p:sp>
+      <p:sp>
+        <p:nvSpPr>
+          <p:cNvPr id="10" name="TextBox 9"/>
+          <p:cNvSpPr txBox="1"/>
+          <p:nvPr/>
+        </p:nvSpPr>
+        <p:spPr>
+          <a:xfrm>
+            <a:off x="640080" y="2011680"/>
+            <a:ext cx="5029200" cy="548640"/>
+          </a:xfrm>
+          <a:prstGeom prst="rect">
+            <a:avLst/>
+          </a:prstGeom>
+          <a:noFill/>
+        </p:spPr>
+        <p:txBody>
+          <a:bodyPr wrap="none">
+            <a:spAutoFit/>
+          </a:bodyPr>
+          <a:lstStyle/>
+          <a:p>
+            <a:pPr algn="l">
+              <a:defRPr sz="2200" b="1">
+                <a:solidFill>
+                  <a:srgbClr val="C41E3A"/>
+                </a:solidFill>
+                <a:latin typeface="Arial"/>
+              </a:defRPr>
+            </a:pPr>
+            <a:r>
+              <a:t>Yo ___ pizza. (comer)</a:t>
+            </a:r>
+          </a:p>
+        </p:txBody>
+      </p:sp>
+      <p:sp>
+        <p:nvSpPr>
+          <p:cNvPr id="11" name="TextBox 10"/>
+          <p:cNvSpPr txBox="1"/>
+          <p:nvPr/>
+        </p:nvSpPr>
+        <p:spPr>
+          <a:xfrm>
+            <a:off x="5943600" y="2011680"/>
+            <a:ext cx="5029200" cy="548640"/>
+          </a:xfrm>
+          <a:prstGeom prst="rect">
+            <a:avLst/>
+          </a:prstGeom>
+          <a:noFill/>
+        </p:spPr>
+        <p:txBody>
+          <a:bodyPr wrap="none">
+            <a:spAutoFit/>
+          </a:bodyPr>
+          <a:lstStyle/>
+          <a:p>
+            <a:pPr algn="l">
+              <a:defRPr sz="2200" b="0">
+                <a:solidFill>
+                  <a:srgbClr val="888888"/>
+                </a:solidFill>
+                <a:latin typeface="Arial"/>
+              </a:defRPr>
+            </a:pPr>
+            <a:r>
+              <a:t>___</a:t>
+            </a:r>
+          </a:p>
+        </p:txBody>
+      </p:sp>
+      <p:sp>
+        <p:nvSpPr>
+          <p:cNvPr id="12" name="TextBox 11"/>
+          <p:cNvSpPr txBox="1"/>
+          <p:nvPr/>
+        </p:nvSpPr>
+        <p:spPr>
+          <a:xfrm>
+            <a:off x="640080" y="2926080"/>
+            <a:ext cx="5029200" cy="548640"/>
+          </a:xfrm>
+          <a:prstGeom prst="rect">
+            <a:avLst/>
+          </a:prstGeom>
+          <a:noFill/>
+        </p:spPr>
+        <p:txBody>
+          <a:bodyPr wrap="none">
+            <a:spAutoFit/>
+          </a:bodyPr>
+          <a:lstStyle/>
+          <a:p>
+            <a:pPr algn="l">
+              <a:defRPr sz="2200" b="1">
+                <a:solidFill>
+                  <a:srgbClr val="C41E3A"/>
+                </a:solidFill>
+                <a:latin typeface="Arial"/>
+              </a:defRPr>
+            </a:pPr>
+            <a:r>
+              <a:t>Tú ___ agua. (beber)</a:t>
+            </a:r>
+          </a:p>
+        </p:txBody>
+      </p:sp>
+      <p:sp>
+        <p:nvSpPr>
+          <p:cNvPr id="13" name="TextBox 12"/>
+          <p:cNvSpPr txBox="1"/>
+          <p:nvPr/>
+        </p:nvSpPr>
+        <p:spPr>
+          <a:xfrm>
+            <a:off x="5943600" y="2926080"/>
+            <a:ext cx="5029200" cy="548640"/>
+          </a:xfrm>
+          <a:prstGeom prst="rect">
+            <a:avLst/>
+          </a:prstGeom>
+          <a:noFill/>
+        </p:spPr>
+        <p:txBody>
+          <a:bodyPr wrap="none">
+            <a:spAutoFit/>
+          </a:bodyPr>
+          <a:lstStyle/>
+          <a:p>
+            <a:pPr algn="l">
+              <a:defRPr sz="2200" b="0">
+                <a:solidFill>
+                  <a:srgbClr val="888888"/>
+                </a:solidFill>
+                <a:latin typeface="Arial"/>
+              </a:defRPr>
+            </a:pPr>
+            <a:r>
+              <a:t>___</a:t>
+            </a:r>
+          </a:p>
+        </p:txBody>
+      </p:sp>
+      <p:sp>
+        <p:nvSpPr>
+          <p:cNvPr id="14" name="Rectangle 13"/>
+          <p:cNvSpPr/>
+          <p:nvPr/>
+        </p:nvSpPr>
+        <p:spPr>
+          <a:xfrm>
+            <a:off x="457200" y="5943600"/>
+            <a:ext cx="11274552" cy="548640"/>
+          </a:xfrm>
+          <a:prstGeom prst="rect">
+            <a:avLst/>
+          </a:prstGeom>
+          <a:solidFill>
+            <a:srgbClr val="FDF2F4"/>
+          </a:solidFill>
+          <a:ln>
+            <a:solidFill>
+              <a:srgbClr val="C41E3A"/>
+            </a:solidFill>
+          </a:ln>
+        </p:spPr>
+        <p:style>
+          <a:lnRef idx="1">
+            <a:schemeClr val="accent1"/>
+          </a:lnRef>
+          <a:fillRef idx="3">
+            <a:schemeClr val="accent1"/>
+          </a:fillRef>
+          <a:effectRef idx="2">
+            <a:schemeClr val="accent1"/>
+          </a:effectRef>
+          <a:fontRef idx="minor">
+            <a:schemeClr val="lt1"/>
+          </a:fontRef>
+        </p:style>
+        <p:txBody>
+          <a:bodyPr rtlCol="0" anchor="ctr"/>
+          <a:lstStyle/>
+          <a:p>
+            <a:pPr algn="ctr"/>
+          </a:p>
+        </p:txBody>
+      </p:sp>
+      <p:sp>
+        <p:nvSpPr>
+          <p:cNvPr id="15" name="TextBox 14"/>
+          <p:cNvSpPr txBox="1"/>
+          <p:nvPr/>
+        </p:nvSpPr>
+        <p:spPr>
+          <a:xfrm>
+            <a:off x="640080" y="6053328"/>
+            <a:ext cx="10972800" cy="365760"/>
+          </a:xfrm>
+          <a:prstGeom prst="rect">
+            <a:avLst/>
+          </a:prstGeom>
+          <a:noFill/>
+        </p:spPr>
+        <p:txBody>
+          <a:bodyPr wrap="none">
+            <a:spAutoFit/>
+          </a:bodyPr>
+          <a:lstStyle/>
+          <a:p>
+            <a:pPr algn="l">
+              <a:defRPr sz="1400" b="1">
+                <a:solidFill>
+                  <a:srgbClr val="C41E3A"/>
+                </a:solidFill>
+                <a:latin typeface="Arial"/>
+              </a:defRPr>
+            </a:pPr>
+            <a:r>
+              <a:t>📝 AB-05b: Aufgabe 2</a:t>
+            </a:r>
+          </a:p>
+        </p:txBody>
+      </p:sp>
+    </p:spTree>
+  </p:cSld>
+  <p:clrMapOvr>
+    <a:masterClrMapping/>
+  </p:clrMapOvr>
+</p:sld>
+</file>
+
+<file path=ppt/slides/slide11.xml><?xml version="1.0" encoding="utf-8"?>
+<p:sld xmlns:a="http://schemas.openxmlformats.org/drawingml/2006/main" xmlns:p="http://schemas.openxmlformats.org/presentationml/2006/main" xmlns:r="http://schemas.openxmlformats.org/officeDocument/2006/relationships">
+  <p:cSld>
+    <p:spTree>
+      <p:nvGrpSpPr>
+        <p:cNvPr id="1" name=""/>
+        <p:cNvGrpSpPr/>
+        <p:nvPr/>
+      </p:nvGrpSpPr>
+      <p:grpSpPr/>
+      <p:sp>
+        <p:nvSpPr>
+          <p:cNvPr id="2" name="Rectangle 1"/>
+          <p:cNvSpPr/>
+          <p:nvPr/>
+        </p:nvSpPr>
+        <p:spPr>
+          <a:xfrm>
+            <a:off x="0" y="0"/>
+            <a:ext cx="12191695" cy="457200"/>
+          </a:xfrm>
+          <a:prstGeom prst="rect">
+            <a:avLst/>
+          </a:prstGeom>
+          <a:solidFill>
+            <a:srgbClr val="C41E3A"/>
+          </a:solidFill>
+          <a:ln>
+            <a:noFill/>
+          </a:ln>
+        </p:spPr>
+        <p:style>
+          <a:lnRef idx="1">
+            <a:schemeClr val="accent1"/>
+          </a:lnRef>
+          <a:fillRef idx="3">
+            <a:schemeClr val="accent1"/>
+          </a:fillRef>
+          <a:effectRef idx="2">
+            <a:schemeClr val="accent1"/>
+          </a:effectRef>
+          <a:fontRef idx="minor">
+            <a:schemeClr val="lt1"/>
+          </a:fontRef>
+        </p:style>
+        <p:txBody>
+          <a:bodyPr rtlCol="0" anchor="ctr"/>
+          <a:lstStyle/>
+          <a:p>
+            <a:pPr algn="ctr"/>
+          </a:p>
+        </p:txBody>
+      </p:sp>
+      <p:sp>
+        <p:nvSpPr>
+          <p:cNvPr id="3" name="TextBox 2"/>
+          <p:cNvSpPr txBox="1"/>
+          <p:nvPr/>
+        </p:nvSpPr>
+        <p:spPr>
+          <a:xfrm>
+            <a:off x="274320" y="91440"/>
+            <a:ext cx="3657600" cy="274320"/>
+          </a:xfrm>
+          <a:prstGeom prst="rect">
+            <a:avLst/>
+          </a:prstGeom>
+          <a:noFill/>
+        </p:spPr>
+        <p:txBody>
+          <a:bodyPr wrap="none">
+            <a:spAutoFit/>
+          </a:bodyPr>
+          <a:lstStyle/>
+          <a:p>
+            <a:pPr algn="l">
+              <a:defRPr sz="1400" b="1">
+                <a:solidFill>
+                  <a:srgbClr val="FFFFFF"/>
+                </a:solidFill>
+                <a:latin typeface="Arial"/>
+              </a:defRPr>
+            </a:pPr>
+            <a:r>
+              <a:t>Spanisch Klasse 7 · LP-05b</a:t>
+            </a:r>
+          </a:p>
+        </p:txBody>
+      </p:sp>
+      <p:sp>
+        <p:nvSpPr>
+          <p:cNvPr id="4" name="Rectangle 3"/>
+          <p:cNvSpPr/>
+          <p:nvPr/>
+        </p:nvSpPr>
+        <p:spPr>
+          <a:xfrm>
+            <a:off x="0" y="6583680"/>
+            <a:ext cx="12191695" cy="274320"/>
+          </a:xfrm>
+          <a:prstGeom prst="rect">
+            <a:avLst/>
+          </a:prstGeom>
+          <a:solidFill>
+            <a:srgbClr val="F5F5F5"/>
+          </a:solidFill>
+          <a:ln>
+            <a:noFill/>
+          </a:ln>
+        </p:spPr>
+        <p:style>
+          <a:lnRef idx="1">
+            <a:schemeClr val="accent1"/>
+          </a:lnRef>
+          <a:fillRef idx="3">
+            <a:schemeClr val="accent1"/>
+          </a:fillRef>
+          <a:effectRef idx="2">
+            <a:schemeClr val="accent1"/>
+          </a:effectRef>
+          <a:fontRef idx="minor">
+            <a:schemeClr val="lt1"/>
+          </a:fontRef>
+        </p:style>
+        <p:txBody>
+          <a:bodyPr rtlCol="0" anchor="ctr"/>
+          <a:lstStyle/>
+          <a:p>
+            <a:pPr algn="ctr"/>
+          </a:p>
+        </p:txBody>
+      </p:sp>
+      <p:sp>
+        <p:nvSpPr>
+          <p:cNvPr id="5" name="TextBox 4"/>
+          <p:cNvSpPr txBox="1"/>
+          <p:nvPr/>
+        </p:nvSpPr>
+        <p:spPr>
+          <a:xfrm>
+            <a:off x="274320" y="6601968"/>
+            <a:ext cx="4572000" cy="228600"/>
+          </a:xfrm>
+          <a:prstGeom prst="rect">
+            <a:avLst/>
+          </a:prstGeom>
+          <a:noFill/>
+        </p:spPr>
+        <p:txBody>
+          <a:bodyPr wrap="none">
+            <a:spAutoFit/>
+          </a:bodyPr>
+          <a:lstStyle/>
+          <a:p>
+            <a:pPr algn="l">
+              <a:defRPr sz="1000" b="0">
+                <a:solidFill>
+                  <a:srgbClr val="555555"/>
+                </a:solidFill>
+                <a:latin typeface="Arial"/>
+              </a:defRPr>
+            </a:pPr>
+            <a:r>
+              <a:t>Verbos en -er/-ir</a:t>
+            </a:r>
+          </a:p>
+        </p:txBody>
+      </p:sp>
+      <p:sp>
+        <p:nvSpPr>
+          <p:cNvPr id="6" name="TextBox 5"/>
+          <p:cNvSpPr txBox="1"/>
+          <p:nvPr/>
+        </p:nvSpPr>
+        <p:spPr>
+          <a:xfrm>
+            <a:off x="9144000" y="6601968"/>
+            <a:ext cx="2743200" cy="228600"/>
+          </a:xfrm>
+          <a:prstGeom prst="rect">
+            <a:avLst/>
+          </a:prstGeom>
+          <a:noFill/>
+        </p:spPr>
+        <p:txBody>
+          <a:bodyPr wrap="none">
+            <a:spAutoFit/>
+          </a:bodyPr>
+          <a:lstStyle/>
+          <a:p>
+            <a:pPr algn="r">
+              <a:defRPr sz="1000" b="0">
+                <a:solidFill>
+                  <a:srgbClr val="555555"/>
+                </a:solidFill>
+                <a:latin typeface="Arial"/>
+              </a:defRPr>
+            </a:pPr>
+            <a:r>
+              <a:t>Sequenz 5</a:t>
+            </a:r>
+          </a:p>
+        </p:txBody>
+      </p:sp>
+      <p:sp>
+        <p:nvSpPr>
+          <p:cNvPr id="7" name="Rectangle 6"/>
+          <p:cNvSpPr/>
+          <p:nvPr/>
+        </p:nvSpPr>
+        <p:spPr>
+          <a:xfrm>
+            <a:off x="457200" y="640080"/>
+            <a:ext cx="1828800" cy="457200"/>
+          </a:xfrm>
+          <a:prstGeom prst="rect">
+            <a:avLst/>
+          </a:prstGeom>
+          <a:solidFill>
+            <a:srgbClr val="C41E3A"/>
+          </a:solidFill>
+          <a:ln>
+            <a:noFill/>
+          </a:ln>
+        </p:spPr>
+        <p:style>
+          <a:lnRef idx="1">
+            <a:schemeClr val="accent1"/>
+          </a:lnRef>
+          <a:fillRef idx="3">
+            <a:schemeClr val="accent1"/>
+          </a:fillRef>
+          <a:effectRef idx="2">
+            <a:schemeClr val="accent1"/>
+          </a:effectRef>
+          <a:fontRef idx="minor">
+            <a:schemeClr val="lt1"/>
+          </a:fontRef>
+        </p:style>
+        <p:txBody>
+          <a:bodyPr rtlCol="0" anchor="ctr"/>
+          <a:lstStyle/>
+          <a:p>
+            <a:pPr algn="ctr"/>
+          </a:p>
+        </p:txBody>
+      </p:sp>
+      <p:sp>
+        <p:nvSpPr>
+          <p:cNvPr id="8" name="TextBox 7"/>
+          <p:cNvSpPr txBox="1"/>
+          <p:nvPr/>
+        </p:nvSpPr>
+        <p:spPr>
+          <a:xfrm>
+            <a:off x="548640" y="713231"/>
+            <a:ext cx="1645920" cy="320040"/>
+          </a:xfrm>
+          <a:prstGeom prst="rect">
+            <a:avLst/>
+          </a:prstGeom>
+          <a:noFill/>
+        </p:spPr>
+        <p:txBody>
+          <a:bodyPr wrap="none">
+            <a:spAutoFit/>
+          </a:bodyPr>
+          <a:lstStyle/>
+          <a:p>
+            <a:pPr algn="ctr">
+              <a:defRPr sz="1400" b="1">
+                <a:solidFill>
+                  <a:srgbClr val="FFFFFF"/>
+                </a:solidFill>
+                <a:latin typeface="Arial"/>
+              </a:defRPr>
+            </a:pPr>
+            <a:r>
+              <a:t>ÜBUNG</a:t>
+            </a:r>
+          </a:p>
+        </p:txBody>
+      </p:sp>
+      <p:sp>
+        <p:nvSpPr>
+          <p:cNvPr id="9" name="TextBox 8"/>
+          <p:cNvSpPr txBox="1"/>
+          <p:nvPr/>
+        </p:nvSpPr>
+        <p:spPr>
+          <a:xfrm>
+            <a:off x="457200" y="1280160"/>
+            <a:ext cx="11274552" cy="731520"/>
+          </a:xfrm>
+          <a:prstGeom prst="rect">
+            <a:avLst/>
+          </a:prstGeom>
+          <a:noFill/>
+        </p:spPr>
+        <p:txBody>
+          <a:bodyPr wrap="none">
+            <a:spAutoFit/>
+          </a:bodyPr>
+          <a:lstStyle/>
+          <a:p>
+            <a:pPr algn="l">
+              <a:defRPr sz="3200" b="1">
+                <a:solidFill>
+                  <a:srgbClr val="C41E3A"/>
+                </a:solidFill>
+                <a:latin typeface="Arial"/>
+              </a:defRPr>
+            </a:pPr>
+            <a:r>
+              <a:t>✏️ Übung: -ir konjugieren</a:t>
+            </a:r>
+          </a:p>
+        </p:txBody>
+      </p:sp>
+      <p:sp>
+        <p:nvSpPr>
+          <p:cNvPr id="10" name="TextBox 9"/>
+          <p:cNvSpPr txBox="1"/>
+          <p:nvPr/>
+        </p:nvSpPr>
+        <p:spPr>
+          <a:xfrm>
+            <a:off x="640080" y="2011680"/>
+            <a:ext cx="5029200" cy="548640"/>
+          </a:xfrm>
+          <a:prstGeom prst="rect">
+            <a:avLst/>
+          </a:prstGeom>
+          <a:noFill/>
+        </p:spPr>
+        <p:txBody>
+          <a:bodyPr wrap="none">
+            <a:spAutoFit/>
+          </a:bodyPr>
+          <a:lstStyle/>
+          <a:p>
+            <a:pPr algn="l">
+              <a:defRPr sz="2200" b="1">
+                <a:solidFill>
+                  <a:srgbClr val="C41E3A"/>
+                </a:solidFill>
+                <a:latin typeface="Arial"/>
+              </a:defRPr>
+            </a:pPr>
+            <a:r>
+              <a:t>Yo ___ en Rostock. (vivir)</a:t>
+            </a:r>
+          </a:p>
+        </p:txBody>
+      </p:sp>
+      <p:sp>
+        <p:nvSpPr>
+          <p:cNvPr id="11" name="TextBox 10"/>
+          <p:cNvSpPr txBox="1"/>
+          <p:nvPr/>
+        </p:nvSpPr>
+        <p:spPr>
+          <a:xfrm>
+            <a:off x="5943600" y="2011680"/>
+            <a:ext cx="5029200" cy="548640"/>
+          </a:xfrm>
+          <a:prstGeom prst="rect">
+            <a:avLst/>
+          </a:prstGeom>
+          <a:noFill/>
+        </p:spPr>
+        <p:txBody>
+          <a:bodyPr wrap="none">
+            <a:spAutoFit/>
+          </a:bodyPr>
+          <a:lstStyle/>
+          <a:p>
+            <a:pPr algn="l">
+              <a:defRPr sz="2200" b="0">
+                <a:solidFill>
+                  <a:srgbClr val="888888"/>
+                </a:solidFill>
+                <a:latin typeface="Arial"/>
+              </a:defRPr>
+            </a:pPr>
+            <a:r>
+              <a:t>___</a:t>
+            </a:r>
+          </a:p>
+        </p:txBody>
+      </p:sp>
+      <p:sp>
+        <p:nvSpPr>
+          <p:cNvPr id="12" name="TextBox 11"/>
+          <p:cNvSpPr txBox="1"/>
+          <p:nvPr/>
+        </p:nvSpPr>
+        <p:spPr>
+          <a:xfrm>
+            <a:off x="640080" y="2926080"/>
+            <a:ext cx="5029200" cy="548640"/>
+          </a:xfrm>
+          <a:prstGeom prst="rect">
+            <a:avLst/>
+          </a:prstGeom>
+          <a:noFill/>
+        </p:spPr>
+        <p:txBody>
+          <a:bodyPr wrap="none">
+            <a:spAutoFit/>
+          </a:bodyPr>
+          <a:lstStyle/>
+          <a:p>
+            <a:pPr algn="l">
+              <a:defRPr sz="2200" b="1">
+                <a:solidFill>
+                  <a:srgbClr val="C41E3A"/>
+                </a:solidFill>
+                <a:latin typeface="Arial"/>
+              </a:defRPr>
+            </a:pPr>
+            <a:r>
+              <a:t>Ella ___ una carta. (escribir)</a:t>
+            </a:r>
+          </a:p>
+        </p:txBody>
+      </p:sp>
+      <p:sp>
+        <p:nvSpPr>
+          <p:cNvPr id="13" name="TextBox 12"/>
+          <p:cNvSpPr txBox="1"/>
+          <p:nvPr/>
+        </p:nvSpPr>
+        <p:spPr>
+          <a:xfrm>
+            <a:off x="5943600" y="2926080"/>
+            <a:ext cx="5029200" cy="548640"/>
+          </a:xfrm>
+          <a:prstGeom prst="rect">
+            <a:avLst/>
+          </a:prstGeom>
+          <a:noFill/>
+        </p:spPr>
+        <p:txBody>
+          <a:bodyPr wrap="none">
+            <a:spAutoFit/>
+          </a:bodyPr>
+          <a:lstStyle/>
+          <a:p>
+            <a:pPr algn="l">
+              <a:defRPr sz="2200" b="0">
+                <a:solidFill>
+                  <a:srgbClr val="888888"/>
+                </a:solidFill>
+                <a:latin typeface="Arial"/>
+              </a:defRPr>
+            </a:pPr>
+            <a:r>
+              <a:t>___</a:t>
+            </a:r>
+          </a:p>
+        </p:txBody>
+      </p:sp>
+      <p:sp>
+        <p:nvSpPr>
+          <p:cNvPr id="14" name="Rectangle 13"/>
+          <p:cNvSpPr/>
+          <p:nvPr/>
+        </p:nvSpPr>
+        <p:spPr>
+          <a:xfrm>
+            <a:off x="457200" y="5943600"/>
+            <a:ext cx="11274552" cy="548640"/>
+          </a:xfrm>
+          <a:prstGeom prst="rect">
+            <a:avLst/>
+          </a:prstGeom>
+          <a:solidFill>
+            <a:srgbClr val="FDF2F4"/>
+          </a:solidFill>
+          <a:ln>
+            <a:solidFill>
+              <a:srgbClr val="C41E3A"/>
+            </a:solidFill>
+          </a:ln>
+        </p:spPr>
+        <p:style>
+          <a:lnRef idx="1">
+            <a:schemeClr val="accent1"/>
+          </a:lnRef>
+          <a:fillRef idx="3">
+            <a:schemeClr val="accent1"/>
+          </a:fillRef>
+          <a:effectRef idx="2">
+            <a:schemeClr val="accent1"/>
+          </a:effectRef>
+          <a:fontRef idx="minor">
+            <a:schemeClr val="lt1"/>
+          </a:fontRef>
+        </p:style>
+        <p:txBody>
+          <a:bodyPr rtlCol="0" anchor="ctr"/>
+          <a:lstStyle/>
+          <a:p>
+            <a:pPr algn="ctr"/>
+          </a:p>
+        </p:txBody>
+      </p:sp>
+      <p:sp>
+        <p:nvSpPr>
+          <p:cNvPr id="15" name="TextBox 14"/>
+          <p:cNvSpPr txBox="1"/>
+          <p:nvPr/>
+        </p:nvSpPr>
+        <p:spPr>
+          <a:xfrm>
+            <a:off x="640080" y="6053328"/>
+            <a:ext cx="10972800" cy="365760"/>
+          </a:xfrm>
+          <a:prstGeom prst="rect">
+            <a:avLst/>
+          </a:prstGeom>
+          <a:noFill/>
+        </p:spPr>
+        <p:txBody>
+          <a:bodyPr wrap="none">
+            <a:spAutoFit/>
+          </a:bodyPr>
+          <a:lstStyle/>
+          <a:p>
+            <a:pPr algn="l">
+              <a:defRPr sz="1400" b="1">
+                <a:solidFill>
+                  <a:srgbClr val="C41E3A"/>
+                </a:solidFill>
+                <a:latin typeface="Arial"/>
+              </a:defRPr>
+            </a:pPr>
+            <a:r>
+              <a:t>📝 AB-05b: Aufgabe 3</a:t>
+            </a:r>
+          </a:p>
+        </p:txBody>
+      </p:sp>
+    </p:spTree>
+  </p:cSld>
+  <p:clrMapOvr>
+    <a:masterClrMapping/>
+  </p:clrMapOvr>
+</p:sld>
+</file>
+
+<file path=ppt/slides/slide12.xml><?xml version="1.0" encoding="utf-8"?>
+<p:sld xmlns:a="http://schemas.openxmlformats.org/drawingml/2006/main" xmlns:p="http://schemas.openxmlformats.org/presentationml/2006/main" xmlns:r="http://schemas.openxmlformats.org/officeDocument/2006/relationships">
+  <p:cSld>
+    <p:spTree>
+      <p:nvGrpSpPr>
+        <p:cNvPr id="1" name=""/>
+        <p:cNvGrpSpPr/>
+        <p:nvPr/>
+      </p:nvGrpSpPr>
+      <p:grpSpPr/>
+      <p:sp>
+        <p:nvSpPr>
+          <p:cNvPr id="2" name="Rectangle 1"/>
+          <p:cNvSpPr/>
+          <p:nvPr/>
+        </p:nvSpPr>
+        <p:spPr>
+          <a:xfrm>
+            <a:off x="0" y="0"/>
+            <a:ext cx="12191695" cy="457200"/>
+          </a:xfrm>
+          <a:prstGeom prst="rect">
+            <a:avLst/>
+          </a:prstGeom>
+          <a:solidFill>
+            <a:srgbClr val="C41E3A"/>
+          </a:solidFill>
+          <a:ln>
+            <a:noFill/>
+          </a:ln>
+        </p:spPr>
+        <p:style>
+          <a:lnRef idx="1">
+            <a:schemeClr val="accent1"/>
+          </a:lnRef>
+          <a:fillRef idx="3">
+            <a:schemeClr val="accent1"/>
+          </a:fillRef>
+          <a:effectRef idx="2">
+            <a:schemeClr val="accent1"/>
+          </a:effectRef>
+          <a:fontRef idx="minor">
+            <a:schemeClr val="lt1"/>
+          </a:fontRef>
+        </p:style>
+        <p:txBody>
+          <a:bodyPr rtlCol="0" anchor="ctr"/>
+          <a:lstStyle/>
+          <a:p>
+            <a:pPr algn="ctr"/>
+          </a:p>
+        </p:txBody>
+      </p:sp>
+      <p:sp>
+        <p:nvSpPr>
+          <p:cNvPr id="3" name="TextBox 2"/>
+          <p:cNvSpPr txBox="1"/>
+          <p:nvPr/>
+        </p:nvSpPr>
+        <p:spPr>
+          <a:xfrm>
+            <a:off x="274320" y="91440"/>
+            <a:ext cx="3657600" cy="274320"/>
+          </a:xfrm>
+          <a:prstGeom prst="rect">
+            <a:avLst/>
+          </a:prstGeom>
+          <a:noFill/>
+        </p:spPr>
+        <p:txBody>
+          <a:bodyPr wrap="none">
+            <a:spAutoFit/>
+          </a:bodyPr>
+          <a:lstStyle/>
+          <a:p>
+            <a:pPr algn="l">
+              <a:defRPr sz="1400" b="1">
+                <a:solidFill>
+                  <a:srgbClr val="FFFFFF"/>
+                </a:solidFill>
+                <a:latin typeface="Arial"/>
+              </a:defRPr>
+            </a:pPr>
+            <a:r>
+              <a:t>Spanisch Klasse 7 · LP-05b</a:t>
+            </a:r>
+          </a:p>
+        </p:txBody>
+      </p:sp>
+      <p:sp>
+        <p:nvSpPr>
+          <p:cNvPr id="4" name="Rectangle 3"/>
+          <p:cNvSpPr/>
+          <p:nvPr/>
+        </p:nvSpPr>
+        <p:spPr>
+          <a:xfrm>
+            <a:off x="0" y="6583680"/>
+            <a:ext cx="12191695" cy="274320"/>
+          </a:xfrm>
+          <a:prstGeom prst="rect">
+            <a:avLst/>
+          </a:prstGeom>
+          <a:solidFill>
+            <a:srgbClr val="F5F5F5"/>
+          </a:solidFill>
+          <a:ln>
+            <a:noFill/>
+          </a:ln>
+        </p:spPr>
+        <p:style>
+          <a:lnRef idx="1">
+            <a:schemeClr val="accent1"/>
+          </a:lnRef>
+          <a:fillRef idx="3">
+            <a:schemeClr val="accent1"/>
+          </a:fillRef>
+          <a:effectRef idx="2">
+            <a:schemeClr val="accent1"/>
+          </a:effectRef>
+          <a:fontRef idx="minor">
+            <a:schemeClr val="lt1"/>
+          </a:fontRef>
+        </p:style>
+        <p:txBody>
+          <a:bodyPr rtlCol="0" anchor="ctr"/>
+          <a:lstStyle/>
+          <a:p>
+            <a:pPr algn="ctr"/>
+          </a:p>
+        </p:txBody>
+      </p:sp>
+      <p:sp>
+        <p:nvSpPr>
+          <p:cNvPr id="5" name="TextBox 4"/>
+          <p:cNvSpPr txBox="1"/>
+          <p:nvPr/>
+        </p:nvSpPr>
+        <p:spPr>
+          <a:xfrm>
+            <a:off x="274320" y="6601968"/>
+            <a:ext cx="4572000" cy="228600"/>
+          </a:xfrm>
+          <a:prstGeom prst="rect">
+            <a:avLst/>
+          </a:prstGeom>
+          <a:noFill/>
+        </p:spPr>
+        <p:txBody>
+          <a:bodyPr wrap="none">
+            <a:spAutoFit/>
+          </a:bodyPr>
+          <a:lstStyle/>
+          <a:p>
+            <a:pPr algn="l">
+              <a:defRPr sz="1000" b="0">
+                <a:solidFill>
+                  <a:srgbClr val="555555"/>
+                </a:solidFill>
+                <a:latin typeface="Arial"/>
+              </a:defRPr>
+            </a:pPr>
+            <a:r>
+              <a:t>Verbos en -er/-ir</a:t>
+            </a:r>
+          </a:p>
+        </p:txBody>
+      </p:sp>
+      <p:sp>
+        <p:nvSpPr>
+          <p:cNvPr id="6" name="TextBox 5"/>
+          <p:cNvSpPr txBox="1"/>
+          <p:nvPr/>
+        </p:nvSpPr>
+        <p:spPr>
+          <a:xfrm>
+            <a:off x="9144000" y="6601968"/>
+            <a:ext cx="2743200" cy="228600"/>
+          </a:xfrm>
+          <a:prstGeom prst="rect">
+            <a:avLst/>
+          </a:prstGeom>
+          <a:noFill/>
+        </p:spPr>
+        <p:txBody>
+          <a:bodyPr wrap="none">
+            <a:spAutoFit/>
+          </a:bodyPr>
+          <a:lstStyle/>
+          <a:p>
+            <a:pPr algn="r">
+              <a:defRPr sz="1000" b="0">
+                <a:solidFill>
+                  <a:srgbClr val="555555"/>
+                </a:solidFill>
+                <a:latin typeface="Arial"/>
+              </a:defRPr>
+            </a:pPr>
+            <a:r>
+              <a:t>Sequenz 5</a:t>
+            </a:r>
+          </a:p>
+        </p:txBody>
+      </p:sp>
+      <p:sp>
+        <p:nvSpPr>
+          <p:cNvPr id="7" name="Rectangle 6"/>
+          <p:cNvSpPr/>
+          <p:nvPr/>
+        </p:nvSpPr>
+        <p:spPr>
+          <a:xfrm>
+            <a:off x="457200" y="640080"/>
+            <a:ext cx="1828800" cy="457200"/>
+          </a:xfrm>
+          <a:prstGeom prst="rect">
+            <a:avLst/>
+          </a:prstGeom>
+          <a:solidFill>
+            <a:srgbClr val="2A7A4B"/>
+          </a:solidFill>
+          <a:ln>
+            <a:noFill/>
+          </a:ln>
+        </p:spPr>
+        <p:style>
+          <a:lnRef idx="1">
+            <a:schemeClr val="accent1"/>
+          </a:lnRef>
+          <a:fillRef idx="3">
+            <a:schemeClr val="accent1"/>
+          </a:fillRef>
+          <a:effectRef idx="2">
+            <a:schemeClr val="accent1"/>
+          </a:effectRef>
+          <a:fontRef idx="minor">
+            <a:schemeClr val="lt1"/>
+          </a:fontRef>
+        </p:style>
+        <p:txBody>
+          <a:bodyPr rtlCol="0" anchor="ctr"/>
+          <a:lstStyle/>
+          <a:p>
+            <a:pPr algn="ctr"/>
+          </a:p>
+        </p:txBody>
+      </p:sp>
+      <p:sp>
+        <p:nvSpPr>
+          <p:cNvPr id="8" name="TextBox 7"/>
+          <p:cNvSpPr txBox="1"/>
+          <p:nvPr/>
+        </p:nvSpPr>
+        <p:spPr>
+          <a:xfrm>
+            <a:off x="548640" y="713231"/>
+            <a:ext cx="1645920" cy="320040"/>
+          </a:xfrm>
+          <a:prstGeom prst="rect">
+            <a:avLst/>
+          </a:prstGeom>
+          <a:noFill/>
+        </p:spPr>
+        <p:txBody>
+          <a:bodyPr wrap="none">
+            <a:spAutoFit/>
+          </a:bodyPr>
+          <a:lstStyle/>
+          <a:p>
+            <a:pPr algn="ctr">
+              <a:defRPr sz="1400" b="1">
+                <a:solidFill>
+                  <a:srgbClr val="FFFFFF"/>
+                </a:solidFill>
+                <a:latin typeface="Arial"/>
+              </a:defRPr>
+            </a:pPr>
+            <a:r>
+              <a:t>LÖSUNG</a:t>
+            </a:r>
+          </a:p>
+        </p:txBody>
+      </p:sp>
+      <p:sp>
+        <p:nvSpPr>
+          <p:cNvPr id="9" name="TextBox 8"/>
+          <p:cNvSpPr txBox="1"/>
+          <p:nvPr/>
+        </p:nvSpPr>
+        <p:spPr>
+          <a:xfrm>
+            <a:off x="457200" y="1280160"/>
+            <a:ext cx="11274552" cy="731520"/>
+          </a:xfrm>
+          <a:prstGeom prst="rect">
+            <a:avLst/>
+          </a:prstGeom>
+          <a:noFill/>
+        </p:spPr>
+        <p:txBody>
+          <a:bodyPr wrap="none">
+            <a:spAutoFit/>
+          </a:bodyPr>
+          <a:lstStyle/>
+          <a:p>
+            <a:pPr algn="l">
+              <a:defRPr sz="3200" b="1">
+                <a:solidFill>
+                  <a:srgbClr val="C41E3A"/>
+                </a:solidFill>
+                <a:latin typeface="Arial"/>
+              </a:defRPr>
+            </a:pPr>
+            <a:r>
+              <a:t>✅ Lösung</a:t>
+            </a:r>
+          </a:p>
+        </p:txBody>
+      </p:sp>
+      <p:sp>
+        <p:nvSpPr>
+          <p:cNvPr id="10" name="TextBox 9"/>
+          <p:cNvSpPr txBox="1"/>
+          <p:nvPr/>
+        </p:nvSpPr>
+        <p:spPr>
+          <a:xfrm>
+            <a:off x="640080" y="2011680"/>
+            <a:ext cx="5029200" cy="548640"/>
+          </a:xfrm>
+          <a:prstGeom prst="rect">
+            <a:avLst/>
+          </a:prstGeom>
+          <a:noFill/>
+        </p:spPr>
+        <p:txBody>
+          <a:bodyPr wrap="none">
+            <a:spAutoFit/>
+          </a:bodyPr>
+          <a:lstStyle/>
+          <a:p>
+            <a:pPr algn="l">
+              <a:defRPr sz="2400" b="1">
+                <a:solidFill>
+                  <a:srgbClr val="C41E3A"/>
+                </a:solidFill>
+                <a:latin typeface="Arial"/>
+              </a:defRPr>
+            </a:pPr>
+            <a:r>
+              <a:t>Yo como pizza.</a:t>
+            </a:r>
+          </a:p>
+        </p:txBody>
+      </p:sp>
+      <p:sp>
+        <p:nvSpPr>
+          <p:cNvPr id="11" name="TextBox 10"/>
+          <p:cNvSpPr txBox="1"/>
+          <p:nvPr/>
+        </p:nvSpPr>
+        <p:spPr>
+          <a:xfrm>
+            <a:off x="5943600" y="2011680"/>
+            <a:ext cx="5029200" cy="548640"/>
+          </a:xfrm>
+          <a:prstGeom prst="rect">
+            <a:avLst/>
+          </a:prstGeom>
+          <a:noFill/>
+        </p:spPr>
+        <p:txBody>
+          <a:bodyPr wrap="none">
+            <a:spAutoFit/>
+          </a:bodyPr>
+          <a:lstStyle/>
+          <a:p>
+            <a:pPr algn="l">
+              <a:defRPr sz="2400" b="1">
+                <a:solidFill>
+                  <a:srgbClr val="2A7A4B"/>
+                </a:solidFill>
+                <a:latin typeface="Arial"/>
+              </a:defRPr>
+            </a:pPr>
+            <a:r>
+              <a:t>✓</a:t>
+            </a:r>
+          </a:p>
+        </p:txBody>
+      </p:sp>
+      <p:sp>
+        <p:nvSpPr>
+          <p:cNvPr id="12" name="TextBox 11"/>
+          <p:cNvSpPr txBox="1"/>
+          <p:nvPr/>
+        </p:nvSpPr>
+        <p:spPr>
+          <a:xfrm>
+            <a:off x="640080" y="3108960"/>
+            <a:ext cx="5029200" cy="548640"/>
+          </a:xfrm>
+          <a:prstGeom prst="rect">
+            <a:avLst/>
+          </a:prstGeom>
+          <a:noFill/>
+        </p:spPr>
+        <p:txBody>
+          <a:bodyPr wrap="none">
+            <a:spAutoFit/>
+          </a:bodyPr>
+          <a:lstStyle/>
+          <a:p>
+            <a:pPr algn="l">
+              <a:defRPr sz="2400" b="1">
+                <a:solidFill>
+                  <a:srgbClr val="C41E3A"/>
+                </a:solidFill>
+                <a:latin typeface="Arial"/>
+              </a:defRPr>
+            </a:pPr>
+            <a:r>
+              <a:t>Tú bebes agua.</a:t>
+            </a:r>
+          </a:p>
+        </p:txBody>
+      </p:sp>
+      <p:sp>
+        <p:nvSpPr>
+          <p:cNvPr id="13" name="TextBox 12"/>
+          <p:cNvSpPr txBox="1"/>
+          <p:nvPr/>
+        </p:nvSpPr>
+        <p:spPr>
+          <a:xfrm>
+            <a:off x="5943600" y="3108960"/>
+            <a:ext cx="5029200" cy="548640"/>
+          </a:xfrm>
+          <a:prstGeom prst="rect">
+            <a:avLst/>
+          </a:prstGeom>
+          <a:noFill/>
+        </p:spPr>
+        <p:txBody>
+          <a:bodyPr wrap="none">
+            <a:spAutoFit/>
+          </a:bodyPr>
+          <a:lstStyle/>
+          <a:p>
+            <a:pPr algn="l">
+              <a:defRPr sz="2400" b="1">
+                <a:solidFill>
+                  <a:srgbClr val="2A7A4B"/>
+                </a:solidFill>
+                <a:latin typeface="Arial"/>
+              </a:defRPr>
+            </a:pPr>
+            <a:r>
+              <a:t>✓</a:t>
+            </a:r>
+          </a:p>
+        </p:txBody>
+      </p:sp>
+      <p:sp>
+        <p:nvSpPr>
+          <p:cNvPr id="14" name="TextBox 13"/>
+          <p:cNvSpPr txBox="1"/>
+          <p:nvPr/>
+        </p:nvSpPr>
+        <p:spPr>
+          <a:xfrm>
+            <a:off x="640080" y="4206240"/>
+            <a:ext cx="5029200" cy="548640"/>
+          </a:xfrm>
+          <a:prstGeom prst="rect">
+            <a:avLst/>
+          </a:prstGeom>
+          <a:noFill/>
+        </p:spPr>
+        <p:txBody>
+          <a:bodyPr wrap="none">
+            <a:spAutoFit/>
+          </a:bodyPr>
+          <a:lstStyle/>
+          <a:p>
+            <a:pPr algn="l">
+              <a:defRPr sz="2400" b="1">
+                <a:solidFill>
+                  <a:srgbClr val="C41E3A"/>
+                </a:solidFill>
+                <a:latin typeface="Arial"/>
+              </a:defRPr>
+            </a:pPr>
+            <a:r>
+              <a:t>Yo vivo en Rostock.</a:t>
+            </a:r>
+          </a:p>
+        </p:txBody>
+      </p:sp>
+      <p:sp>
+        <p:nvSpPr>
+          <p:cNvPr id="15" name="TextBox 14"/>
+          <p:cNvSpPr txBox="1"/>
+          <p:nvPr/>
+        </p:nvSpPr>
+        <p:spPr>
+          <a:xfrm>
+            <a:off x="5943600" y="4206240"/>
+            <a:ext cx="5029200" cy="548640"/>
+          </a:xfrm>
+          <a:prstGeom prst="rect">
+            <a:avLst/>
+          </a:prstGeom>
+          <a:noFill/>
+        </p:spPr>
+        <p:txBody>
+          <a:bodyPr wrap="none">
+            <a:spAutoFit/>
+          </a:bodyPr>
+          <a:lstStyle/>
+          <a:p>
+            <a:pPr algn="l">
+              <a:defRPr sz="2400" b="1">
+                <a:solidFill>
+                  <a:srgbClr val="2A7A4B"/>
+                </a:solidFill>
+                <a:latin typeface="Arial"/>
+              </a:defRPr>
+            </a:pPr>
+            <a:r>
+              <a:t>✓</a:t>
+            </a:r>
+          </a:p>
+        </p:txBody>
+      </p:sp>
+      <p:sp>
+        <p:nvSpPr>
+          <p:cNvPr id="16" name="TextBox 15"/>
+          <p:cNvSpPr txBox="1"/>
+          <p:nvPr/>
+        </p:nvSpPr>
+        <p:spPr>
+          <a:xfrm>
+            <a:off x="640080" y="5303520"/>
+            <a:ext cx="5029200" cy="548640"/>
+          </a:xfrm>
+          <a:prstGeom prst="rect">
+            <a:avLst/>
+          </a:prstGeom>
+          <a:noFill/>
+        </p:spPr>
+        <p:txBody>
+          <a:bodyPr wrap="none">
+            <a:spAutoFit/>
+          </a:bodyPr>
+          <a:lstStyle/>
+          <a:p>
+            <a:pPr algn="l">
+              <a:defRPr sz="2400" b="1">
+                <a:solidFill>
+                  <a:srgbClr val="C41E3A"/>
+                </a:solidFill>
+                <a:latin typeface="Arial"/>
+              </a:defRPr>
+            </a:pPr>
+            <a:r>
+              <a:t>Ella escribe una carta.</a:t>
+            </a:r>
+          </a:p>
+        </p:txBody>
+      </p:sp>
+      <p:sp>
+        <p:nvSpPr>
+          <p:cNvPr id="17" name="TextBox 16"/>
+          <p:cNvSpPr txBox="1"/>
+          <p:nvPr/>
+        </p:nvSpPr>
+        <p:spPr>
+          <a:xfrm>
+            <a:off x="5943600" y="5303520"/>
+            <a:ext cx="5029200" cy="548640"/>
+          </a:xfrm>
+          <a:prstGeom prst="rect">
+            <a:avLst/>
+          </a:prstGeom>
+          <a:noFill/>
+        </p:spPr>
+        <p:txBody>
+          <a:bodyPr wrap="none">
+            <a:spAutoFit/>
+          </a:bodyPr>
+          <a:lstStyle/>
+          <a:p>
+            <a:pPr algn="l">
+              <a:defRPr sz="2400" b="1">
+                <a:solidFill>
+                  <a:srgbClr val="2A7A4B"/>
+                </a:solidFill>
+                <a:latin typeface="Arial"/>
+              </a:defRPr>
+            </a:pPr>
+            <a:r>
+              <a:t>✓</a:t>
+            </a:r>
+          </a:p>
+        </p:txBody>
+      </p:sp>
+    </p:spTree>
+  </p:cSld>
+  <p:clrMapOvr>
+    <a:masterClrMapping/>
+  </p:clrMapOvr>
+</p:sld>
+</file>
+
+<file path=ppt/slides/slide13.xml><?xml version="1.0" encoding="utf-8"?>
+<p:sld xmlns:a="http://schemas.openxmlformats.org/drawingml/2006/main" xmlns:p="http://schemas.openxmlformats.org/presentationml/2006/main" xmlns:r="http://schemas.openxmlformats.org/officeDocument/2006/relationships">
+  <p:cSld>
+    <p:spTree>
+      <p:nvGrpSpPr>
+        <p:cNvPr id="1" name=""/>
+        <p:cNvGrpSpPr/>
+        <p:nvPr/>
+      </p:nvGrpSpPr>
+      <p:grpSpPr/>
+      <p:sp>
+        <p:nvSpPr>
+          <p:cNvPr id="2" name="Rectangle 1"/>
+          <p:cNvSpPr/>
+          <p:nvPr/>
+        </p:nvSpPr>
+        <p:spPr>
+          <a:xfrm>
+            <a:off x="0" y="0"/>
+            <a:ext cx="12191695" cy="457200"/>
+          </a:xfrm>
+          <a:prstGeom prst="rect">
+            <a:avLst/>
+          </a:prstGeom>
+          <a:solidFill>
+            <a:srgbClr val="C41E3A"/>
+          </a:solidFill>
+          <a:ln>
+            <a:noFill/>
+          </a:ln>
+        </p:spPr>
+        <p:style>
+          <a:lnRef idx="1">
+            <a:schemeClr val="accent1"/>
+          </a:lnRef>
+          <a:fillRef idx="3">
+            <a:schemeClr val="accent1"/>
+          </a:fillRef>
+          <a:effectRef idx="2">
+            <a:schemeClr val="accent1"/>
+          </a:effectRef>
+          <a:fontRef idx="minor">
+            <a:schemeClr val="lt1"/>
+          </a:fontRef>
+        </p:style>
+        <p:txBody>
+          <a:bodyPr rtlCol="0" anchor="ctr"/>
+          <a:lstStyle/>
+          <a:p>
+            <a:pPr algn="ctr"/>
+          </a:p>
+        </p:txBody>
+      </p:sp>
+      <p:sp>
+        <p:nvSpPr>
+          <p:cNvPr id="3" name="TextBox 2"/>
+          <p:cNvSpPr txBox="1"/>
+          <p:nvPr/>
+        </p:nvSpPr>
+        <p:spPr>
+          <a:xfrm>
+            <a:off x="274320" y="91440"/>
+            <a:ext cx="3657600" cy="274320"/>
+          </a:xfrm>
+          <a:prstGeom prst="rect">
+            <a:avLst/>
+          </a:prstGeom>
+          <a:noFill/>
+        </p:spPr>
+        <p:txBody>
+          <a:bodyPr wrap="none">
+            <a:spAutoFit/>
+          </a:bodyPr>
+          <a:lstStyle/>
+          <a:p>
+            <a:pPr algn="l">
+              <a:defRPr sz="1400" b="1">
+                <a:solidFill>
+                  <a:srgbClr val="FFFFFF"/>
+                </a:solidFill>
+                <a:latin typeface="Arial"/>
+              </a:defRPr>
+            </a:pPr>
+            <a:r>
+              <a:t>Spanisch Klasse 7 · LP-05b</a:t>
+            </a:r>
+          </a:p>
+        </p:txBody>
+      </p:sp>
+      <p:sp>
+        <p:nvSpPr>
+          <p:cNvPr id="4" name="Rectangle 3"/>
+          <p:cNvSpPr/>
+          <p:nvPr/>
+        </p:nvSpPr>
+        <p:spPr>
+          <a:xfrm>
+            <a:off x="0" y="6583680"/>
+            <a:ext cx="12191695" cy="274320"/>
+          </a:xfrm>
+          <a:prstGeom prst="rect">
+            <a:avLst/>
+          </a:prstGeom>
+          <a:solidFill>
+            <a:srgbClr val="F5F5F5"/>
+          </a:solidFill>
+          <a:ln>
+            <a:noFill/>
+          </a:ln>
+        </p:spPr>
+        <p:style>
+          <a:lnRef idx="1">
+            <a:schemeClr val="accent1"/>
+          </a:lnRef>
+          <a:fillRef idx="3">
+            <a:schemeClr val="accent1"/>
+          </a:fillRef>
+          <a:effectRef idx="2">
+            <a:schemeClr val="accent1"/>
+          </a:effectRef>
+          <a:fontRef idx="minor">
+            <a:schemeClr val="lt1"/>
+          </a:fontRef>
+        </p:style>
+        <p:txBody>
+          <a:bodyPr rtlCol="0" anchor="ctr"/>
+          <a:lstStyle/>
+          <a:p>
+            <a:pPr algn="ctr"/>
+          </a:p>
+        </p:txBody>
+      </p:sp>
+      <p:sp>
+        <p:nvSpPr>
+          <p:cNvPr id="5" name="TextBox 4"/>
+          <p:cNvSpPr txBox="1"/>
+          <p:nvPr/>
+        </p:nvSpPr>
+        <p:spPr>
+          <a:xfrm>
+            <a:off x="274320" y="6601968"/>
+            <a:ext cx="4572000" cy="228600"/>
+          </a:xfrm>
+          <a:prstGeom prst="rect">
+            <a:avLst/>
+          </a:prstGeom>
+          <a:noFill/>
+        </p:spPr>
+        <p:txBody>
+          <a:bodyPr wrap="none">
+            <a:spAutoFit/>
+          </a:bodyPr>
+          <a:lstStyle/>
+          <a:p>
+            <a:pPr algn="l">
+              <a:defRPr sz="1000" b="0">
+                <a:solidFill>
+                  <a:srgbClr val="555555"/>
+                </a:solidFill>
+                <a:latin typeface="Arial"/>
+              </a:defRPr>
+            </a:pPr>
+            <a:r>
+              <a:t>Verbos en -er/-ir</a:t>
+            </a:r>
+          </a:p>
+        </p:txBody>
+      </p:sp>
+      <p:sp>
+        <p:nvSpPr>
+          <p:cNvPr id="6" name="TextBox 5"/>
+          <p:cNvSpPr txBox="1"/>
+          <p:nvPr/>
+        </p:nvSpPr>
+        <p:spPr>
+          <a:xfrm>
+            <a:off x="9144000" y="6601968"/>
+            <a:ext cx="2743200" cy="228600"/>
+          </a:xfrm>
+          <a:prstGeom prst="rect">
+            <a:avLst/>
+          </a:prstGeom>
+          <a:noFill/>
+        </p:spPr>
+        <p:txBody>
+          <a:bodyPr wrap="none">
+            <a:spAutoFit/>
+          </a:bodyPr>
+          <a:lstStyle/>
+          <a:p>
+            <a:pPr algn="r">
+              <a:defRPr sz="1000" b="0">
+                <a:solidFill>
+                  <a:srgbClr val="555555"/>
+                </a:solidFill>
+                <a:latin typeface="Arial"/>
+              </a:defRPr>
+            </a:pPr>
+            <a:r>
+              <a:t>Sequenz 5</a:t>
+            </a:r>
+          </a:p>
+        </p:txBody>
+      </p:sp>
+      <p:sp>
+        <p:nvSpPr>
+          <p:cNvPr id="7" name="TextBox 6"/>
+          <p:cNvSpPr txBox="1"/>
+          <p:nvPr/>
+        </p:nvSpPr>
+        <p:spPr>
+          <a:xfrm>
+            <a:off x="457200" y="640080"/>
+            <a:ext cx="11274552" cy="731520"/>
+          </a:xfrm>
+          <a:prstGeom prst="rect">
+            <a:avLst/>
+          </a:prstGeom>
+          <a:noFill/>
+        </p:spPr>
+        <p:txBody>
+          <a:bodyPr wrap="none">
+            <a:spAutoFit/>
+          </a:bodyPr>
+          <a:lstStyle/>
+          <a:p>
+            <a:pPr algn="l">
+              <a:defRPr sz="3200" b="1">
+                <a:solidFill>
+                  <a:srgbClr val="C41E3A"/>
+                </a:solidFill>
+                <a:latin typeface="Arial"/>
+              </a:defRPr>
+            </a:pPr>
+            <a:r>
+              <a:t>📋 Zusammenfassung</a:t>
+            </a:r>
+          </a:p>
+        </p:txBody>
+      </p:sp>
+      <p:sp>
+        <p:nvSpPr>
+          <p:cNvPr id="8" name="TextBox 7"/>
+          <p:cNvSpPr txBox="1"/>
+          <p:nvPr/>
+        </p:nvSpPr>
+        <p:spPr>
+          <a:xfrm>
+            <a:off x="640080" y="1463040"/>
+            <a:ext cx="5029200" cy="457200"/>
+          </a:xfrm>
+          <a:prstGeom prst="rect">
+            <a:avLst/>
+          </a:prstGeom>
+          <a:noFill/>
+        </p:spPr>
+        <p:txBody>
+          <a:bodyPr wrap="none">
+            <a:spAutoFit/>
+          </a:bodyPr>
+          <a:lstStyle/>
+          <a:p>
+            <a:pPr algn="l">
+              <a:defRPr sz="2000" b="1">
+                <a:solidFill>
+                  <a:srgbClr val="C41E3A"/>
+                </a:solidFill>
+                <a:latin typeface="Arial"/>
+              </a:defRPr>
+            </a:pPr>
+            <a:r>
+              <a:t>Vokabeln</a:t>
+            </a:r>
+          </a:p>
+        </p:txBody>
+      </p:sp>
+      <p:sp>
+        <p:nvSpPr>
+          <p:cNvPr id="9" name="TextBox 8"/>
+          <p:cNvSpPr txBox="1"/>
+          <p:nvPr/>
+        </p:nvSpPr>
+        <p:spPr>
+          <a:xfrm>
+            <a:off x="822960" y="2011680"/>
+            <a:ext cx="4846320" cy="457200"/>
+          </a:xfrm>
+          <a:prstGeom prst="rect">
+            <a:avLst/>
+          </a:prstGeom>
+          <a:noFill/>
+        </p:spPr>
+        <p:txBody>
+          <a:bodyPr wrap="none">
+            <a:spAutoFit/>
+          </a:bodyPr>
+          <a:lstStyle/>
+          <a:p>
+            <a:pPr algn="l">
+              <a:defRPr sz="1800" b="0">
+                <a:solidFill>
+                  <a:srgbClr val="222222"/>
+                </a:solidFill>
+                <a:latin typeface="Arial"/>
+              </a:defRPr>
+            </a:pPr>
+            <a:r>
+              <a:t>•  -er: -o, -es, -e</a:t>
+            </a:r>
+          </a:p>
+        </p:txBody>
+      </p:sp>
+      <p:sp>
+        <p:nvSpPr>
+          <p:cNvPr id="10" name="TextBox 9"/>
+          <p:cNvSpPr txBox="1"/>
+          <p:nvPr/>
+        </p:nvSpPr>
+        <p:spPr>
+          <a:xfrm>
+            <a:off x="822960" y="2560320"/>
+            <a:ext cx="4846320" cy="457200"/>
+          </a:xfrm>
+          <a:prstGeom prst="rect">
+            <a:avLst/>
+          </a:prstGeom>
+          <a:noFill/>
+        </p:spPr>
+        <p:txBody>
+          <a:bodyPr wrap="none">
+            <a:spAutoFit/>
+          </a:bodyPr>
+          <a:lstStyle/>
+          <a:p>
+            <a:pPr algn="l">
+              <a:defRPr sz="1800" b="0">
+                <a:solidFill>
+                  <a:srgbClr val="222222"/>
+                </a:solidFill>
+                <a:latin typeface="Arial"/>
+              </a:defRPr>
+            </a:pPr>
+            <a:r>
+              <a:t>•  -emos, -éis, -en</a:t>
+            </a:r>
+          </a:p>
+        </p:txBody>
+      </p:sp>
+      <p:sp>
+        <p:nvSpPr>
+          <p:cNvPr id="11" name="TextBox 10"/>
+          <p:cNvSpPr txBox="1"/>
+          <p:nvPr/>
+        </p:nvSpPr>
+        <p:spPr>
+          <a:xfrm>
+            <a:off x="822960" y="3108960"/>
+            <a:ext cx="4846320" cy="457200"/>
+          </a:xfrm>
+          <a:prstGeom prst="rect">
+            <a:avLst/>
+          </a:prstGeom>
+          <a:noFill/>
+        </p:spPr>
+        <p:txBody>
+          <a:bodyPr wrap="none">
+            <a:spAutoFit/>
+          </a:bodyPr>
+          <a:lstStyle/>
+          <a:p>
+            <a:pPr algn="l">
+              <a:defRPr sz="1800" b="0">
+                <a:solidFill>
+                  <a:srgbClr val="222222"/>
+                </a:solidFill>
+                <a:latin typeface="Arial"/>
+              </a:defRPr>
+            </a:pPr>
+            <a:r>
+              <a:t>•  comer, beber, leer</a:t>
+            </a:r>
+          </a:p>
+        </p:txBody>
+      </p:sp>
+      <p:sp>
+        <p:nvSpPr>
+          <p:cNvPr id="12" name="TextBox 11"/>
+          <p:cNvSpPr txBox="1"/>
+          <p:nvPr/>
+        </p:nvSpPr>
+        <p:spPr>
+          <a:xfrm>
+            <a:off x="6400800" y="1463040"/>
+            <a:ext cx="5029200" cy="457200"/>
+          </a:xfrm>
+          <a:prstGeom prst="rect">
+            <a:avLst/>
+          </a:prstGeom>
+          <a:noFill/>
+        </p:spPr>
+        <p:txBody>
+          <a:bodyPr wrap="none">
+            <a:spAutoFit/>
+          </a:bodyPr>
+          <a:lstStyle/>
+          <a:p>
+            <a:pPr algn="l">
+              <a:defRPr sz="2000" b="1">
+                <a:solidFill>
+                  <a:srgbClr val="C41E3A"/>
+                </a:solidFill>
+                <a:latin typeface="Arial"/>
+              </a:defRPr>
+            </a:pPr>
+            <a:r>
+              <a:t>Grammatik</a:t>
+            </a:r>
+          </a:p>
+        </p:txBody>
+      </p:sp>
+      <p:sp>
+        <p:nvSpPr>
+          <p:cNvPr id="13" name="TextBox 12"/>
+          <p:cNvSpPr txBox="1"/>
+          <p:nvPr/>
+        </p:nvSpPr>
+        <p:spPr>
+          <a:xfrm>
+            <a:off x="6583680" y="2011680"/>
+            <a:ext cx="4846320" cy="457200"/>
+          </a:xfrm>
+          <a:prstGeom prst="rect">
+            <a:avLst/>
+          </a:prstGeom>
+          <a:noFill/>
+        </p:spPr>
+        <p:txBody>
+          <a:bodyPr wrap="none">
+            <a:spAutoFit/>
+          </a:bodyPr>
+          <a:lstStyle/>
+          <a:p>
+            <a:pPr algn="l">
+              <a:defRPr sz="1800" b="0">
+                <a:solidFill>
+                  <a:srgbClr val="222222"/>
+                </a:solidFill>
+                <a:latin typeface="Arial"/>
+              </a:defRPr>
+            </a:pPr>
+            <a:r>
+              <a:t>•  -ir: -o, -es, -e</a:t>
+            </a:r>
+          </a:p>
+        </p:txBody>
+      </p:sp>
+      <p:sp>
+        <p:nvSpPr>
+          <p:cNvPr id="14" name="TextBox 13"/>
+          <p:cNvSpPr txBox="1"/>
+          <p:nvPr/>
+        </p:nvSpPr>
+        <p:spPr>
+          <a:xfrm>
+            <a:off x="6583680" y="2560320"/>
+            <a:ext cx="4846320" cy="457200"/>
+          </a:xfrm>
+          <a:prstGeom prst="rect">
+            <a:avLst/>
+          </a:prstGeom>
+          <a:noFill/>
+        </p:spPr>
+        <p:txBody>
+          <a:bodyPr wrap="none">
+            <a:spAutoFit/>
+          </a:bodyPr>
+          <a:lstStyle/>
+          <a:p>
+            <a:pPr algn="l">
+              <a:defRPr sz="1800" b="0">
+                <a:solidFill>
+                  <a:srgbClr val="222222"/>
+                </a:solidFill>
+                <a:latin typeface="Arial"/>
+              </a:defRPr>
+            </a:pPr>
+            <a:r>
+              <a:t>•  -imos, -ís, -en</a:t>
+            </a:r>
+          </a:p>
+        </p:txBody>
+      </p:sp>
+      <p:sp>
+        <p:nvSpPr>
+          <p:cNvPr id="15" name="TextBox 14"/>
+          <p:cNvSpPr txBox="1"/>
+          <p:nvPr/>
+        </p:nvSpPr>
+        <p:spPr>
+          <a:xfrm>
+            <a:off x="6583680" y="3108960"/>
+            <a:ext cx="4846320" cy="457200"/>
+          </a:xfrm>
+          <a:prstGeom prst="rect">
+            <a:avLst/>
+          </a:prstGeom>
+          <a:noFill/>
+        </p:spPr>
+        <p:txBody>
+          <a:bodyPr wrap="none">
+            <a:spAutoFit/>
+          </a:bodyPr>
+          <a:lstStyle/>
+          <a:p>
+            <a:pPr algn="l">
+              <a:defRPr sz="1800" b="0">
+                <a:solidFill>
+                  <a:srgbClr val="222222"/>
+                </a:solidFill>
+                <a:latin typeface="Arial"/>
+              </a:defRPr>
+            </a:pPr>
+            <a:r>
+              <a:t>•  vivir, escribir</a:t>
+            </a:r>
+          </a:p>
+        </p:txBody>
+      </p:sp>
+    </p:spTree>
+  </p:cSld>
+  <p:clrMapOvr>
+    <a:masterClrMapping/>
+  </p:clrMapOvr>
+</p:sld>
+</file>
+
+<file path=ppt/slides/slide14.xml><?xml version="1.0" encoding="utf-8"?>
+<p:sld xmlns:a="http://schemas.openxmlformats.org/drawingml/2006/main" xmlns:p="http://schemas.openxmlformats.org/presentationml/2006/main" xmlns:r="http://schemas.openxmlformats.org/officeDocument/2006/relationships">
+  <p:cSld>
+    <p:spTree>
+      <p:nvGrpSpPr>
+        <p:cNvPr id="1" name=""/>
+        <p:cNvGrpSpPr/>
+        <p:nvPr/>
+      </p:nvGrpSpPr>
+      <p:grpSpPr/>
+      <p:sp>
+        <p:nvSpPr>
+          <p:cNvPr id="2" name="Rectangle 1"/>
+          <p:cNvSpPr/>
+          <p:nvPr/>
+        </p:nvSpPr>
+        <p:spPr>
+          <a:xfrm>
+            <a:off x="0" y="0"/>
+            <a:ext cx="12191695" cy="457200"/>
+          </a:xfrm>
+          <a:prstGeom prst="rect">
+            <a:avLst/>
+          </a:prstGeom>
+          <a:solidFill>
+            <a:srgbClr val="C41E3A"/>
+          </a:solidFill>
+          <a:ln>
+            <a:noFill/>
+          </a:ln>
+        </p:spPr>
+        <p:style>
+          <a:lnRef idx="1">
+            <a:schemeClr val="accent1"/>
+          </a:lnRef>
+          <a:fillRef idx="3">
+            <a:schemeClr val="accent1"/>
+          </a:fillRef>
+          <a:effectRef idx="2">
+            <a:schemeClr val="accent1"/>
+          </a:effectRef>
+          <a:fontRef idx="minor">
+            <a:schemeClr val="lt1"/>
+          </a:fontRef>
+        </p:style>
+        <p:txBody>
+          <a:bodyPr rtlCol="0" anchor="ctr"/>
+          <a:lstStyle/>
+          <a:p>
+            <a:pPr algn="ctr"/>
+          </a:p>
+        </p:txBody>
+      </p:sp>
+      <p:sp>
+        <p:nvSpPr>
+          <p:cNvPr id="3" name="TextBox 2"/>
+          <p:cNvSpPr txBox="1"/>
+          <p:nvPr/>
+        </p:nvSpPr>
+        <p:spPr>
+          <a:xfrm>
+            <a:off x="274320" y="91440"/>
+            <a:ext cx="3657600" cy="274320"/>
+          </a:xfrm>
+          <a:prstGeom prst="rect">
+            <a:avLst/>
+          </a:prstGeom>
+          <a:noFill/>
+        </p:spPr>
+        <p:txBody>
+          <a:bodyPr wrap="none">
+            <a:spAutoFit/>
+          </a:bodyPr>
+          <a:lstStyle/>
+          <a:p>
+            <a:pPr algn="l">
+              <a:defRPr sz="1400" b="1">
+                <a:solidFill>
+                  <a:srgbClr val="FFFFFF"/>
+                </a:solidFill>
+                <a:latin typeface="Arial"/>
+              </a:defRPr>
+            </a:pPr>
+            <a:r>
+              <a:t>Spanisch Klasse 7 · LP-05b</a:t>
+            </a:r>
+          </a:p>
+        </p:txBody>
+      </p:sp>
+      <p:sp>
+        <p:nvSpPr>
+          <p:cNvPr id="4" name="Rectangle 3"/>
+          <p:cNvSpPr/>
+          <p:nvPr/>
+        </p:nvSpPr>
+        <p:spPr>
+          <a:xfrm>
+            <a:off x="0" y="6583680"/>
+            <a:ext cx="12191695" cy="274320"/>
+          </a:xfrm>
+          <a:prstGeom prst="rect">
+            <a:avLst/>
+          </a:prstGeom>
+          <a:solidFill>
+            <a:srgbClr val="F5F5F5"/>
+          </a:solidFill>
+          <a:ln>
+            <a:noFill/>
+          </a:ln>
+        </p:spPr>
+        <p:style>
+          <a:lnRef idx="1">
+            <a:schemeClr val="accent1"/>
+          </a:lnRef>
+          <a:fillRef idx="3">
+            <a:schemeClr val="accent1"/>
+          </a:fillRef>
+          <a:effectRef idx="2">
+            <a:schemeClr val="accent1"/>
+          </a:effectRef>
+          <a:fontRef idx="minor">
+            <a:schemeClr val="lt1"/>
+          </a:fontRef>
+        </p:style>
+        <p:txBody>
+          <a:bodyPr rtlCol="0" anchor="ctr"/>
+          <a:lstStyle/>
+          <a:p>
+            <a:pPr algn="ctr"/>
+          </a:p>
+        </p:txBody>
+      </p:sp>
+      <p:sp>
+        <p:nvSpPr>
+          <p:cNvPr id="5" name="TextBox 4"/>
+          <p:cNvSpPr txBox="1"/>
+          <p:nvPr/>
+        </p:nvSpPr>
+        <p:spPr>
+          <a:xfrm>
+            <a:off x="274320" y="6601968"/>
+            <a:ext cx="4572000" cy="228600"/>
+          </a:xfrm>
+          <a:prstGeom prst="rect">
+            <a:avLst/>
+          </a:prstGeom>
+          <a:noFill/>
+        </p:spPr>
+        <p:txBody>
+          <a:bodyPr wrap="none">
+            <a:spAutoFit/>
+          </a:bodyPr>
+          <a:lstStyle/>
+          <a:p>
+            <a:pPr algn="l">
+              <a:defRPr sz="1000" b="0">
+                <a:solidFill>
+                  <a:srgbClr val="555555"/>
+                </a:solidFill>
+                <a:latin typeface="Arial"/>
+              </a:defRPr>
+            </a:pPr>
+            <a:r>
+              <a:t>Verbos en -er/-ir</a:t>
+            </a:r>
+          </a:p>
+        </p:txBody>
+      </p:sp>
+      <p:sp>
+        <p:nvSpPr>
+          <p:cNvPr id="6" name="TextBox 5"/>
+          <p:cNvSpPr txBox="1"/>
+          <p:nvPr/>
+        </p:nvSpPr>
+        <p:spPr>
+          <a:xfrm>
+            <a:off x="9144000" y="6601968"/>
+            <a:ext cx="2743200" cy="228600"/>
+          </a:xfrm>
+          <a:prstGeom prst="rect">
+            <a:avLst/>
+          </a:prstGeom>
+          <a:noFill/>
+        </p:spPr>
+        <p:txBody>
+          <a:bodyPr wrap="none">
+            <a:spAutoFit/>
+          </a:bodyPr>
+          <a:lstStyle/>
+          <a:p>
+            <a:pPr algn="r">
+              <a:defRPr sz="1000" b="0">
+                <a:solidFill>
+                  <a:srgbClr val="555555"/>
+                </a:solidFill>
+                <a:latin typeface="Arial"/>
+              </a:defRPr>
+            </a:pPr>
+            <a:r>
+              <a:t>Sequenz 5</a:t>
+            </a:r>
+          </a:p>
+        </p:txBody>
+      </p:sp>
+      <p:sp>
+        <p:nvSpPr>
+          <p:cNvPr id="7" name="Rectangle 6"/>
+          <p:cNvSpPr/>
+          <p:nvPr/>
+        </p:nvSpPr>
+        <p:spPr>
+          <a:xfrm>
+            <a:off x="457200" y="640080"/>
+            <a:ext cx="1828800" cy="457200"/>
+          </a:xfrm>
+          <a:prstGeom prst="rect">
+            <a:avLst/>
+          </a:prstGeom>
+          <a:solidFill>
+            <a:srgbClr val="C41E3A"/>
+          </a:solidFill>
+          <a:ln>
+            <a:noFill/>
+          </a:ln>
+        </p:spPr>
+        <p:style>
+          <a:lnRef idx="1">
+            <a:schemeClr val="accent1"/>
+          </a:lnRef>
+          <a:fillRef idx="3">
+            <a:schemeClr val="accent1"/>
+          </a:fillRef>
+          <a:effectRef idx="2">
+            <a:schemeClr val="accent1"/>
+          </a:effectRef>
+          <a:fontRef idx="minor">
+            <a:schemeClr val="lt1"/>
+          </a:fontRef>
+        </p:style>
+        <p:txBody>
+          <a:bodyPr rtlCol="0" anchor="ctr"/>
+          <a:lstStyle/>
+          <a:p>
+            <a:pPr algn="ctr"/>
+          </a:p>
+        </p:txBody>
+      </p:sp>
+      <p:sp>
+        <p:nvSpPr>
+          <p:cNvPr id="8" name="TextBox 7"/>
+          <p:cNvSpPr txBox="1"/>
+          <p:nvPr/>
+        </p:nvSpPr>
+        <p:spPr>
+          <a:xfrm>
+            <a:off x="548640" y="713231"/>
+            <a:ext cx="1645920" cy="320040"/>
+          </a:xfrm>
+          <a:prstGeom prst="rect">
+            <a:avLst/>
+          </a:prstGeom>
+          <a:noFill/>
+        </p:spPr>
+        <p:txBody>
+          <a:bodyPr wrap="none">
+            <a:spAutoFit/>
+          </a:bodyPr>
+          <a:lstStyle/>
+          <a:p>
+            <a:pPr algn="ctr">
+              <a:defRPr sz="1400" b="1">
+                <a:solidFill>
+                  <a:srgbClr val="FFFFFF"/>
+                </a:solidFill>
+                <a:latin typeface="Arial"/>
+              </a:defRPr>
+            </a:pPr>
+            <a:r>
+              <a:t>HAUSAUFGABE</a:t>
+            </a:r>
+          </a:p>
+        </p:txBody>
+      </p:sp>
+      <p:sp>
+        <p:nvSpPr>
+          <p:cNvPr id="9" name="TextBox 8"/>
+          <p:cNvSpPr txBox="1"/>
+          <p:nvPr/>
+        </p:nvSpPr>
+        <p:spPr>
+          <a:xfrm>
+            <a:off x="457200" y="1280160"/>
+            <a:ext cx="11274552" cy="731520"/>
+          </a:xfrm>
+          <a:prstGeom prst="rect">
+            <a:avLst/>
+          </a:prstGeom>
+          <a:noFill/>
+        </p:spPr>
+        <p:txBody>
+          <a:bodyPr wrap="none">
+            <a:spAutoFit/>
+          </a:bodyPr>
+          <a:lstStyle/>
+          <a:p>
+            <a:pPr algn="l">
+              <a:defRPr sz="3200" b="1">
+                <a:solidFill>
+                  <a:srgbClr val="C41E3A"/>
+                </a:solidFill>
+                <a:latin typeface="Arial"/>
+              </a:defRPr>
+            </a:pPr>
+            <a:r>
+              <a:t>📚 Para casa</a:t>
+            </a:r>
+          </a:p>
+        </p:txBody>
+      </p:sp>
+      <p:sp>
+        <p:nvSpPr>
+          <p:cNvPr id="10" name="TextBox 9"/>
+          <p:cNvSpPr txBox="1"/>
+          <p:nvPr/>
+        </p:nvSpPr>
+        <p:spPr>
+          <a:xfrm>
+            <a:off x="640080" y="2103120"/>
+            <a:ext cx="457200" cy="457200"/>
+          </a:xfrm>
+          <a:prstGeom prst="rect">
+            <a:avLst/>
+          </a:prstGeom>
+          <a:noFill/>
+        </p:spPr>
+        <p:txBody>
+          <a:bodyPr wrap="none">
+            <a:spAutoFit/>
+          </a:bodyPr>
+          <a:lstStyle/>
+          <a:p>
+            <a:pPr algn="l">
+              <a:defRPr sz="2400" b="1">
+                <a:solidFill>
+                  <a:srgbClr val="2A7A4B"/>
+                </a:solidFill>
+                <a:latin typeface="Arial"/>
+              </a:defRPr>
+            </a:pPr>
+            <a:r>
+              <a:t>✓</a:t>
+            </a:r>
+          </a:p>
+        </p:txBody>
+      </p:sp>
+      <p:sp>
+        <p:nvSpPr>
+          <p:cNvPr id="11" name="TextBox 10"/>
+          <p:cNvSpPr txBox="1"/>
+          <p:nvPr/>
+        </p:nvSpPr>
+        <p:spPr>
+          <a:xfrm>
+            <a:off x="1188720" y="2103120"/>
+            <a:ext cx="10058400" cy="457200"/>
+          </a:xfrm>
+          <a:prstGeom prst="rect">
+            <a:avLst/>
+          </a:prstGeom>
+          <a:noFill/>
+        </p:spPr>
+        <p:txBody>
+          <a:bodyPr wrap="none">
+            <a:spAutoFit/>
+          </a:bodyPr>
+          <a:lstStyle/>
+          <a:p>
+            <a:pPr algn="l">
+              <a:defRPr sz="2000" b="0">
+                <a:solidFill>
+                  <a:srgbClr val="222222"/>
+                </a:solidFill>
+                <a:latin typeface="Arial"/>
+              </a:defRPr>
+            </a:pPr>
+            <a:r>
+              <a:t>-er und -ir Endungen lernen</a:t>
+            </a:r>
+          </a:p>
+        </p:txBody>
+      </p:sp>
+      <p:sp>
+        <p:nvSpPr>
+          <p:cNvPr id="12" name="TextBox 11"/>
+          <p:cNvSpPr txBox="1"/>
+          <p:nvPr/>
+        </p:nvSpPr>
+        <p:spPr>
+          <a:xfrm>
+            <a:off x="640080" y="2926079"/>
+            <a:ext cx="457200" cy="457200"/>
+          </a:xfrm>
+          <a:prstGeom prst="rect">
+            <a:avLst/>
+          </a:prstGeom>
+          <a:noFill/>
+        </p:spPr>
+        <p:txBody>
+          <a:bodyPr wrap="none">
+            <a:spAutoFit/>
+          </a:bodyPr>
+          <a:lstStyle/>
+          <a:p>
+            <a:pPr algn="l">
+              <a:defRPr sz="2400" b="1">
+                <a:solidFill>
+                  <a:srgbClr val="2A7A4B"/>
+                </a:solidFill>
+                <a:latin typeface="Arial"/>
+              </a:defRPr>
+            </a:pPr>
+            <a:r>
+              <a:t>✓</a:t>
+            </a:r>
+          </a:p>
+        </p:txBody>
+      </p:sp>
+      <p:sp>
+        <p:nvSpPr>
+          <p:cNvPr id="13" name="TextBox 12"/>
+          <p:cNvSpPr txBox="1"/>
+          <p:nvPr/>
+        </p:nvSpPr>
+        <p:spPr>
+          <a:xfrm>
+            <a:off x="1188720" y="2926079"/>
+            <a:ext cx="10058400" cy="457200"/>
+          </a:xfrm>
+          <a:prstGeom prst="rect">
+            <a:avLst/>
+          </a:prstGeom>
+          <a:noFill/>
+        </p:spPr>
+        <p:txBody>
+          <a:bodyPr wrap="none">
+            <a:spAutoFit/>
+          </a:bodyPr>
+          <a:lstStyle/>
+          <a:p>
+            <a:pPr algn="l">
+              <a:defRPr sz="2000" b="0">
+                <a:solidFill>
+                  <a:srgbClr val="222222"/>
+                </a:solidFill>
+                <a:latin typeface="Arial"/>
+              </a:defRPr>
+            </a:pPr>
+            <a:r>
+              <a:t>10 Sätze schreiben</a:t>
+            </a:r>
+          </a:p>
+        </p:txBody>
+      </p:sp>
+      <p:sp>
+        <p:nvSpPr>
+          <p:cNvPr id="14" name="TextBox 13"/>
+          <p:cNvSpPr txBox="1"/>
+          <p:nvPr/>
+        </p:nvSpPr>
+        <p:spPr>
+          <a:xfrm>
+            <a:off x="640080" y="3749039"/>
+            <a:ext cx="457200" cy="457200"/>
+          </a:xfrm>
+          <a:prstGeom prst="rect">
+            <a:avLst/>
+          </a:prstGeom>
+          <a:noFill/>
+        </p:spPr>
+        <p:txBody>
+          <a:bodyPr wrap="none">
+            <a:spAutoFit/>
+          </a:bodyPr>
+          <a:lstStyle/>
+          <a:p>
+            <a:pPr algn="l">
+              <a:defRPr sz="2400" b="1">
+                <a:solidFill>
+                  <a:srgbClr val="2A7A4B"/>
+                </a:solidFill>
+                <a:latin typeface="Arial"/>
+              </a:defRPr>
+            </a:pPr>
+            <a:r>
+              <a:t>✓</a:t>
+            </a:r>
+          </a:p>
+        </p:txBody>
+      </p:sp>
+      <p:sp>
+        <p:nvSpPr>
+          <p:cNvPr id="15" name="TextBox 14"/>
+          <p:cNvSpPr txBox="1"/>
+          <p:nvPr/>
+        </p:nvSpPr>
+        <p:spPr>
+          <a:xfrm>
+            <a:off x="1188720" y="3749039"/>
+            <a:ext cx="10058400" cy="457200"/>
+          </a:xfrm>
+          <a:prstGeom prst="rect">
+            <a:avLst/>
+          </a:prstGeom>
+          <a:noFill/>
+        </p:spPr>
+        <p:txBody>
+          <a:bodyPr wrap="none">
+            <a:spAutoFit/>
+          </a:bodyPr>
+          <a:lstStyle/>
+          <a:p>
+            <a:pPr algn="l">
+              <a:defRPr sz="2000" b="0">
+                <a:solidFill>
+                  <a:srgbClr val="222222"/>
+                </a:solidFill>
+                <a:latin typeface="Arial"/>
+              </a:defRPr>
+            </a:pPr>
+            <a:r>
+              <a:t>AB-05b vollständig</a:t>
+            </a:r>
+          </a:p>
+        </p:txBody>
+      </p:sp>
+      <p:sp>
+        <p:nvSpPr>
+          <p:cNvPr id="16" name="TextBox 15"/>
+          <p:cNvSpPr txBox="1"/>
+          <p:nvPr/>
+        </p:nvSpPr>
+        <p:spPr>
+          <a:xfrm>
+            <a:off x="457200" y="5760720"/>
+            <a:ext cx="11274552" cy="548640"/>
+          </a:xfrm>
+          <a:prstGeom prst="rect">
+            <a:avLst/>
+          </a:prstGeom>
+          <a:noFill/>
+        </p:spPr>
+        <p:txBody>
+          <a:bodyPr wrap="none">
+            <a:spAutoFit/>
+          </a:bodyPr>
+          <a:lstStyle/>
+          <a:p>
+            <a:pPr algn="ctr">
+              <a:defRPr sz="3200" b="1">
+                <a:solidFill>
+                  <a:srgbClr val="C41E3A"/>
+                </a:solidFill>
+                <a:latin typeface="Arial"/>
+              </a:defRPr>
+            </a:pPr>
+            <a:r>
+              <a:t>¡Hasta luego!</a:t>
+            </a:r>
+          </a:p>
+        </p:txBody>
+      </p:sp>
+    </p:spTree>
+  </p:cSld>
+  <p:clrMapOvr>
+    <a:masterClrMapping/>
+  </p:clrMapOvr>
+</p:sld>
+</file>
+
 <file path=ppt/slides/slide2.xml><?xml version="1.0" encoding="utf-8"?>
 <p:sld xmlns:a="http://schemas.openxmlformats.org/drawingml/2006/main" xmlns:p="http://schemas.openxmlformats.org/presentationml/2006/main" xmlns:r="http://schemas.openxmlformats.org/officeDocument/2006/relationships">
   <p:cSld>
@@ -3558,7 +6401,7 @@
               </a:defRPr>
             </a:pPr>
             <a:r>
-              <a:t>📝 comer (essen)</a:t>
+              <a:t>Lernziele</a:t>
             </a:r>
           </a:p>
         </p:txBody>
@@ -3572,29 +6415,29 @@
         <p:spPr>
           <a:xfrm>
             <a:off x="640080" y="1463040"/>
-            <a:ext cx="5029200" cy="731520"/>
-          </a:xfrm>
-          <a:prstGeom prst="rect">
-            <a:avLst/>
-          </a:prstGeom>
-          <a:noFill/>
-        </p:spPr>
-        <p:txBody>
-          <a:bodyPr wrap="none">
-            <a:spAutoFit/>
-          </a:bodyPr>
-          <a:lstStyle/>
-          <a:p>
-            <a:pPr algn="l">
-              <a:defRPr sz="2800" b="1">
-                <a:solidFill>
-                  <a:srgbClr val="C41E3A"/>
-                </a:solidFill>
-                <a:latin typeface="Arial"/>
-              </a:defRPr>
-            </a:pPr>
-            <a:r>
-              <a:t>yo como</a:t>
+            <a:ext cx="10972800" cy="548640"/>
+          </a:xfrm>
+          <a:prstGeom prst="rect">
+            <a:avLst/>
+          </a:prstGeom>
+          <a:noFill/>
+        </p:spPr>
+        <p:txBody>
+          <a:bodyPr wrap="none">
+            <a:spAutoFit/>
+          </a:bodyPr>
+          <a:lstStyle/>
+          <a:p>
+            <a:pPr algn="l">
+              <a:defRPr sz="2000" b="0">
+                <a:solidFill>
+                  <a:srgbClr val="222222"/>
+                </a:solidFill>
+                <a:latin typeface="Arial"/>
+              </a:defRPr>
+            </a:pPr>
+            <a:r>
+              <a:t>Regelmäßige -er-Verben</a:t>
             </a:r>
           </a:p>
         </p:txBody>
@@ -3607,30 +6450,30 @@
         </p:nvSpPr>
         <p:spPr>
           <a:xfrm>
-            <a:off x="5943600" y="1554480"/>
-            <a:ext cx="5486400" cy="548640"/>
-          </a:xfrm>
-          <a:prstGeom prst="rect">
-            <a:avLst/>
-          </a:prstGeom>
-          <a:noFill/>
-        </p:spPr>
-        <p:txBody>
-          <a:bodyPr wrap="none">
-            <a:spAutoFit/>
-          </a:bodyPr>
-          <a:lstStyle/>
-          <a:p>
-            <a:pPr algn="l">
-              <a:defRPr sz="1800" b="0">
-                <a:solidFill>
-                  <a:srgbClr val="555555"/>
-                </a:solidFill>
-                <a:latin typeface="Arial"/>
-              </a:defRPr>
-            </a:pPr>
-            <a:r>
-              <a:t>ich esse</a:t>
+            <a:off x="640080" y="2194560"/>
+            <a:ext cx="10972800" cy="548640"/>
+          </a:xfrm>
+          <a:prstGeom prst="rect">
+            <a:avLst/>
+          </a:prstGeom>
+          <a:noFill/>
+        </p:spPr>
+        <p:txBody>
+          <a:bodyPr wrap="none">
+            <a:spAutoFit/>
+          </a:bodyPr>
+          <a:lstStyle/>
+          <a:p>
+            <a:pPr algn="l">
+              <a:defRPr sz="2000" b="0">
+                <a:solidFill>
+                  <a:srgbClr val="222222"/>
+                </a:solidFill>
+                <a:latin typeface="Arial"/>
+              </a:defRPr>
+            </a:pPr>
+            <a:r>
+              <a:t>Regelmäßige -ir-Verben</a:t>
             </a:r>
           </a:p>
         </p:txBody>
@@ -3643,138 +6486,30 @@
         </p:nvSpPr>
         <p:spPr>
           <a:xfrm>
-            <a:off x="640080" y="2560320"/>
-            <a:ext cx="5029200" cy="731520"/>
-          </a:xfrm>
-          <a:prstGeom prst="rect">
-            <a:avLst/>
-          </a:prstGeom>
-          <a:noFill/>
-        </p:spPr>
-        <p:txBody>
-          <a:bodyPr wrap="none">
-            <a:spAutoFit/>
-          </a:bodyPr>
-          <a:lstStyle/>
-          <a:p>
-            <a:pPr algn="l">
-              <a:defRPr sz="2800" b="1">
-                <a:solidFill>
-                  <a:srgbClr val="C41E3A"/>
-                </a:solidFill>
-                <a:latin typeface="Arial"/>
-              </a:defRPr>
-            </a:pPr>
-            <a:r>
-              <a:t>tú comes</a:t>
-            </a:r>
-          </a:p>
-        </p:txBody>
-      </p:sp>
-      <p:sp>
-        <p:nvSpPr>
-          <p:cNvPr id="11" name="TextBox 10"/>
-          <p:cNvSpPr txBox="1"/>
-          <p:nvPr/>
-        </p:nvSpPr>
-        <p:spPr>
-          <a:xfrm>
-            <a:off x="5943600" y="2651760"/>
-            <a:ext cx="5486400" cy="548640"/>
-          </a:xfrm>
-          <a:prstGeom prst="rect">
-            <a:avLst/>
-          </a:prstGeom>
-          <a:noFill/>
-        </p:spPr>
-        <p:txBody>
-          <a:bodyPr wrap="none">
-            <a:spAutoFit/>
-          </a:bodyPr>
-          <a:lstStyle/>
-          <a:p>
-            <a:pPr algn="l">
-              <a:defRPr sz="1800" b="0">
-                <a:solidFill>
-                  <a:srgbClr val="555555"/>
-                </a:solidFill>
-                <a:latin typeface="Arial"/>
-              </a:defRPr>
-            </a:pPr>
-            <a:r>
-              <a:t>du isst</a:t>
-            </a:r>
-          </a:p>
-        </p:txBody>
-      </p:sp>
-      <p:sp>
-        <p:nvSpPr>
-          <p:cNvPr id="12" name="TextBox 11"/>
-          <p:cNvSpPr txBox="1"/>
-          <p:nvPr/>
-        </p:nvSpPr>
-        <p:spPr>
-          <a:xfrm>
-            <a:off x="640080" y="3657600"/>
-            <a:ext cx="5029200" cy="731520"/>
-          </a:xfrm>
-          <a:prstGeom prst="rect">
-            <a:avLst/>
-          </a:prstGeom>
-          <a:noFill/>
-        </p:spPr>
-        <p:txBody>
-          <a:bodyPr wrap="none">
-            <a:spAutoFit/>
-          </a:bodyPr>
-          <a:lstStyle/>
-          <a:p>
-            <a:pPr algn="l">
-              <a:defRPr sz="2800" b="1">
-                <a:solidFill>
-                  <a:srgbClr val="C41E3A"/>
-                </a:solidFill>
-                <a:latin typeface="Arial"/>
-              </a:defRPr>
-            </a:pPr>
-            <a:r>
-              <a:t>él/ella come</a:t>
-            </a:r>
-          </a:p>
-        </p:txBody>
-      </p:sp>
-      <p:sp>
-        <p:nvSpPr>
-          <p:cNvPr id="13" name="TextBox 12"/>
-          <p:cNvSpPr txBox="1"/>
-          <p:nvPr/>
-        </p:nvSpPr>
-        <p:spPr>
-          <a:xfrm>
-            <a:off x="5943600" y="3749039"/>
-            <a:ext cx="5486400" cy="548640"/>
-          </a:xfrm>
-          <a:prstGeom prst="rect">
-            <a:avLst/>
-          </a:prstGeom>
-          <a:noFill/>
-        </p:spPr>
-        <p:txBody>
-          <a:bodyPr wrap="none">
-            <a:spAutoFit/>
-          </a:bodyPr>
-          <a:lstStyle/>
-          <a:p>
-            <a:pPr algn="l">
-              <a:defRPr sz="1800" b="0">
-                <a:solidFill>
-                  <a:srgbClr val="555555"/>
-                </a:solidFill>
-                <a:latin typeface="Arial"/>
-              </a:defRPr>
-            </a:pPr>
-            <a:r>
-              <a:t>er/sie isst</a:t>
+            <a:off x="640080" y="2926080"/>
+            <a:ext cx="10972800" cy="548640"/>
+          </a:xfrm>
+          <a:prstGeom prst="rect">
+            <a:avLst/>
+          </a:prstGeom>
+          <a:noFill/>
+        </p:spPr>
+        <p:txBody>
+          <a:bodyPr wrap="none">
+            <a:spAutoFit/>
+          </a:bodyPr>
+          <a:lstStyle/>
+          <a:p>
+            <a:pPr algn="l">
+              <a:defRPr sz="2000" b="0">
+                <a:solidFill>
+                  <a:srgbClr val="222222"/>
+                </a:solidFill>
+                <a:latin typeface="Arial"/>
+              </a:defRPr>
+            </a:pPr>
+            <a:r>
+              <a:t>Unterschied zu -ar-Verben</a:t>
             </a:r>
           </a:p>
         </p:txBody>
@@ -4022,7 +6757,7 @@
               </a:defRPr>
             </a:pPr>
             <a:r>
-              <a:t>📝 vivir (leben)</a:t>
+              <a:t>📝 comer (essen): Konjugation</a:t>
             </a:r>
           </a:p>
         </p:txBody>
@@ -4058,7 +6793,7 @@
               </a:defRPr>
             </a:pPr>
             <a:r>
-              <a:t>yo vivo</a:t>
+              <a:t>yo como</a:t>
             </a:r>
           </a:p>
         </p:txBody>
@@ -4094,7 +6829,7 @@
               </a:defRPr>
             </a:pPr>
             <a:r>
-              <a:t>ich lebe</a:t>
+              <a:t>ich esse</a:t>
             </a:r>
           </a:p>
         </p:txBody>
@@ -4130,7 +6865,7 @@
               </a:defRPr>
             </a:pPr>
             <a:r>
-              <a:t>tú vives</a:t>
+              <a:t>tú comes</a:t>
             </a:r>
           </a:p>
         </p:txBody>
@@ -4166,7 +6901,79 @@
               </a:defRPr>
             </a:pPr>
             <a:r>
-              <a:t>du lebst</a:t>
+              <a:t>du isst</a:t>
+            </a:r>
+          </a:p>
+        </p:txBody>
+      </p:sp>
+      <p:sp>
+        <p:nvSpPr>
+          <p:cNvPr id="12" name="TextBox 11"/>
+          <p:cNvSpPr txBox="1"/>
+          <p:nvPr/>
+        </p:nvSpPr>
+        <p:spPr>
+          <a:xfrm>
+            <a:off x="640080" y="3657600"/>
+            <a:ext cx="5029200" cy="731520"/>
+          </a:xfrm>
+          <a:prstGeom prst="rect">
+            <a:avLst/>
+          </a:prstGeom>
+          <a:noFill/>
+        </p:spPr>
+        <p:txBody>
+          <a:bodyPr wrap="none">
+            <a:spAutoFit/>
+          </a:bodyPr>
+          <a:lstStyle/>
+          <a:p>
+            <a:pPr algn="l">
+              <a:defRPr sz="2800" b="1">
+                <a:solidFill>
+                  <a:srgbClr val="C41E3A"/>
+                </a:solidFill>
+                <a:latin typeface="Arial"/>
+              </a:defRPr>
+            </a:pPr>
+            <a:r>
+              <a:t>él/ella come</a:t>
+            </a:r>
+          </a:p>
+        </p:txBody>
+      </p:sp>
+      <p:sp>
+        <p:nvSpPr>
+          <p:cNvPr id="13" name="TextBox 12"/>
+          <p:cNvSpPr txBox="1"/>
+          <p:nvPr/>
+        </p:nvSpPr>
+        <p:spPr>
+          <a:xfrm>
+            <a:off x="5943600" y="3749039"/>
+            <a:ext cx="5486400" cy="548640"/>
+          </a:xfrm>
+          <a:prstGeom prst="rect">
+            <a:avLst/>
+          </a:prstGeom>
+          <a:noFill/>
+        </p:spPr>
+        <p:txBody>
+          <a:bodyPr wrap="none">
+            <a:spAutoFit/>
+          </a:bodyPr>
+          <a:lstStyle/>
+          <a:p>
+            <a:pPr algn="l">
+              <a:defRPr sz="1800" b="0">
+                <a:solidFill>
+                  <a:srgbClr val="555555"/>
+                </a:solidFill>
+                <a:latin typeface="Arial"/>
+              </a:defRPr>
+            </a:pPr>
+            <a:r>
+              <a:t>er/sie isst</a:t>
             </a:r>
           </a:p>
         </p:txBody>
@@ -4414,51 +7221,44 @@
               </a:defRPr>
             </a:pPr>
             <a:r>
-              <a:t>📚 -er/-ir-Verben</a:t>
-            </a:r>
-          </a:p>
-        </p:txBody>
-      </p:sp>
-      <p:sp>
-        <p:nvSpPr>
-          <p:cNvPr id="8" name="Rectangle 7"/>
-          <p:cNvSpPr/>
-          <p:nvPr/>
-        </p:nvSpPr>
-        <p:spPr>
-          <a:xfrm>
-            <a:off x="457200" y="1371600"/>
-            <a:ext cx="11274552" cy="594360"/>
-          </a:xfrm>
-          <a:prstGeom prst="rect">
-            <a:avLst/>
-          </a:prstGeom>
-          <a:solidFill>
-            <a:srgbClr val="C41E3A"/>
-          </a:solidFill>
-          <a:ln>
-            <a:noFill/>
-          </a:ln>
-        </p:spPr>
-        <p:style>
-          <a:lnRef idx="1">
-            <a:schemeClr val="accent1"/>
-          </a:lnRef>
-          <a:fillRef idx="3">
-            <a:schemeClr val="accent1"/>
-          </a:fillRef>
-          <a:effectRef idx="2">
-            <a:schemeClr val="accent1"/>
-          </a:effectRef>
-          <a:fontRef idx="minor">
-            <a:schemeClr val="lt1"/>
-          </a:fontRef>
-        </p:style>
-        <p:txBody>
-          <a:bodyPr rtlCol="0" anchor="ctr"/>
-          <a:lstStyle/>
-          <a:p>
-            <a:pPr algn="ctr"/>
+              <a:t>📝 comer: Plural</a:t>
+            </a:r>
+          </a:p>
+        </p:txBody>
+      </p:sp>
+      <p:sp>
+        <p:nvSpPr>
+          <p:cNvPr id="8" name="TextBox 7"/>
+          <p:cNvSpPr txBox="1"/>
+          <p:nvPr/>
+        </p:nvSpPr>
+        <p:spPr>
+          <a:xfrm>
+            <a:off x="640080" y="1463040"/>
+            <a:ext cx="5029200" cy="731520"/>
+          </a:xfrm>
+          <a:prstGeom prst="rect">
+            <a:avLst/>
+          </a:prstGeom>
+          <a:noFill/>
+        </p:spPr>
+        <p:txBody>
+          <a:bodyPr wrap="none">
+            <a:spAutoFit/>
+          </a:bodyPr>
+          <a:lstStyle/>
+          <a:p>
+            <a:pPr algn="l">
+              <a:defRPr sz="2800" b="1">
+                <a:solidFill>
+                  <a:srgbClr val="C41E3A"/>
+                </a:solidFill>
+                <a:latin typeface="Arial"/>
+              </a:defRPr>
+            </a:pPr>
+            <a:r>
+              <a:t>nosotros comemos</a:t>
+            </a:r>
           </a:p>
         </p:txBody>
       </p:sp>
@@ -4470,30 +7270,30 @@
         </p:nvSpPr>
         <p:spPr>
           <a:xfrm>
-            <a:off x="640080" y="1481328"/>
-            <a:ext cx="5029200" cy="365760"/>
-          </a:xfrm>
-          <a:prstGeom prst="rect">
-            <a:avLst/>
-          </a:prstGeom>
-          <a:noFill/>
-        </p:spPr>
-        <p:txBody>
-          <a:bodyPr wrap="none">
-            <a:spAutoFit/>
-          </a:bodyPr>
-          <a:lstStyle/>
-          <a:p>
-            <a:pPr algn="l">
-              <a:defRPr sz="1800" b="1">
-                <a:solidFill>
-                  <a:srgbClr val="FFFFFF"/>
-                </a:solidFill>
-                <a:latin typeface="Arial"/>
-              </a:defRPr>
-            </a:pPr>
-            <a:r>
-              <a:t>Spanisch</a:t>
+            <a:off x="5943600" y="1554480"/>
+            <a:ext cx="5486400" cy="548640"/>
+          </a:xfrm>
+          <a:prstGeom prst="rect">
+            <a:avLst/>
+          </a:prstGeom>
+          <a:noFill/>
+        </p:spPr>
+        <p:txBody>
+          <a:bodyPr wrap="none">
+            <a:spAutoFit/>
+          </a:bodyPr>
+          <a:lstStyle/>
+          <a:p>
+            <a:pPr algn="l">
+              <a:defRPr sz="1800" b="0">
+                <a:solidFill>
+                  <a:srgbClr val="555555"/>
+                </a:solidFill>
+                <a:latin typeface="Arial"/>
+              </a:defRPr>
+            </a:pPr>
+            <a:r>
+              <a:t>wir essen</a:t>
             </a:r>
           </a:p>
         </p:txBody>
@@ -4506,30 +7306,30 @@
         </p:nvSpPr>
         <p:spPr>
           <a:xfrm>
-            <a:off x="5943600" y="1481328"/>
-            <a:ext cx="5029200" cy="365760"/>
-          </a:xfrm>
-          <a:prstGeom prst="rect">
-            <a:avLst/>
-          </a:prstGeom>
-          <a:noFill/>
-        </p:spPr>
-        <p:txBody>
-          <a:bodyPr wrap="none">
-            <a:spAutoFit/>
-          </a:bodyPr>
-          <a:lstStyle/>
-          <a:p>
-            <a:pPr algn="l">
-              <a:defRPr sz="1800" b="1">
-                <a:solidFill>
-                  <a:srgbClr val="FFFFFF"/>
-                </a:solidFill>
-                <a:latin typeface="Arial"/>
-              </a:defRPr>
-            </a:pPr>
-            <a:r>
-              <a:t>Deutsch</a:t>
+            <a:off x="640080" y="2560320"/>
+            <a:ext cx="5029200" cy="731520"/>
+          </a:xfrm>
+          <a:prstGeom prst="rect">
+            <a:avLst/>
+          </a:prstGeom>
+          <a:noFill/>
+        </p:spPr>
+        <p:txBody>
+          <a:bodyPr wrap="none">
+            <a:spAutoFit/>
+          </a:bodyPr>
+          <a:lstStyle/>
+          <a:p>
+            <a:pPr algn="l">
+              <a:defRPr sz="2800" b="1">
+                <a:solidFill>
+                  <a:srgbClr val="C41E3A"/>
+                </a:solidFill>
+                <a:latin typeface="Arial"/>
+              </a:defRPr>
+            </a:pPr>
+            <a:r>
+              <a:t>vosotros coméis</a:t>
             </a:r>
           </a:p>
         </p:txBody>
@@ -4542,22 +7342,58 @@
         </p:nvSpPr>
         <p:spPr>
           <a:xfrm>
-            <a:off x="640080" y="2075688"/>
-            <a:ext cx="5029200" cy="365760"/>
-          </a:xfrm>
-          <a:prstGeom prst="rect">
-            <a:avLst/>
-          </a:prstGeom>
-          <a:noFill/>
-        </p:spPr>
-        <p:txBody>
-          <a:bodyPr wrap="none">
-            <a:spAutoFit/>
-          </a:bodyPr>
-          <a:lstStyle/>
-          <a:p>
-            <a:pPr algn="l">
-              <a:defRPr sz="2000" b="1">
+            <a:off x="5943600" y="2651760"/>
+            <a:ext cx="5486400" cy="548640"/>
+          </a:xfrm>
+          <a:prstGeom prst="rect">
+            <a:avLst/>
+          </a:prstGeom>
+          <a:noFill/>
+        </p:spPr>
+        <p:txBody>
+          <a:bodyPr wrap="none">
+            <a:spAutoFit/>
+          </a:bodyPr>
+          <a:lstStyle/>
+          <a:p>
+            <a:pPr algn="l">
+              <a:defRPr sz="1800" b="0">
+                <a:solidFill>
+                  <a:srgbClr val="555555"/>
+                </a:solidFill>
+                <a:latin typeface="Arial"/>
+              </a:defRPr>
+            </a:pPr>
+            <a:r>
+              <a:t>ihr esst</a:t>
+            </a:r>
+          </a:p>
+        </p:txBody>
+      </p:sp>
+      <p:sp>
+        <p:nvSpPr>
+          <p:cNvPr id="12" name="TextBox 11"/>
+          <p:cNvSpPr txBox="1"/>
+          <p:nvPr/>
+        </p:nvSpPr>
+        <p:spPr>
+          <a:xfrm>
+            <a:off x="640080" y="3657600"/>
+            <a:ext cx="5029200" cy="731520"/>
+          </a:xfrm>
+          <a:prstGeom prst="rect">
+            <a:avLst/>
+          </a:prstGeom>
+          <a:noFill/>
+        </p:spPr>
+        <p:txBody>
+          <a:bodyPr wrap="none">
+            <a:spAutoFit/>
+          </a:bodyPr>
+          <a:lstStyle/>
+          <a:p>
+            <a:pPr algn="l">
+              <a:defRPr sz="2800" b="1">
                 <a:solidFill>
                   <a:srgbClr val="C41E3A"/>
                 </a:solidFill>
@@ -4565,311 +7401,43 @@
               </a:defRPr>
             </a:pPr>
             <a:r>
-              <a:t>leer</a:t>
-            </a:r>
-          </a:p>
-        </p:txBody>
-      </p:sp>
-      <p:sp>
-        <p:nvSpPr>
-          <p:cNvPr id="12" name="TextBox 11"/>
-          <p:cNvSpPr txBox="1"/>
-          <p:nvPr/>
-        </p:nvSpPr>
-        <p:spPr>
-          <a:xfrm>
-            <a:off x="5943600" y="2075688"/>
-            <a:ext cx="5029200" cy="365760"/>
-          </a:xfrm>
-          <a:prstGeom prst="rect">
-            <a:avLst/>
-          </a:prstGeom>
-          <a:noFill/>
-        </p:spPr>
-        <p:txBody>
-          <a:bodyPr wrap="none">
-            <a:spAutoFit/>
-          </a:bodyPr>
-          <a:lstStyle/>
-          <a:p>
-            <a:pPr algn="l">
-              <a:defRPr sz="2000" b="0">
-                <a:solidFill>
-                  <a:srgbClr val="222222"/>
-                </a:solidFill>
-                <a:latin typeface="Arial"/>
-              </a:defRPr>
-            </a:pPr>
-            <a:r>
-              <a:t>lesen</a:t>
-            </a:r>
-          </a:p>
-        </p:txBody>
-      </p:sp>
-      <p:sp>
-        <p:nvSpPr>
-          <p:cNvPr id="13" name="Rectangle 12"/>
-          <p:cNvSpPr/>
-          <p:nvPr/>
-        </p:nvSpPr>
-        <p:spPr>
-          <a:xfrm>
-            <a:off x="457200" y="2560320"/>
-            <a:ext cx="11274552" cy="594360"/>
-          </a:xfrm>
-          <a:prstGeom prst="rect">
-            <a:avLst/>
-          </a:prstGeom>
-          <a:solidFill>
-            <a:srgbClr val="F5F5F5"/>
-          </a:solidFill>
-          <a:ln>
-            <a:noFill/>
-          </a:ln>
-        </p:spPr>
-        <p:style>
-          <a:lnRef idx="1">
-            <a:schemeClr val="accent1"/>
-          </a:lnRef>
-          <a:fillRef idx="3">
-            <a:schemeClr val="accent1"/>
-          </a:fillRef>
-          <a:effectRef idx="2">
-            <a:schemeClr val="accent1"/>
-          </a:effectRef>
-          <a:fontRef idx="minor">
-            <a:schemeClr val="lt1"/>
-          </a:fontRef>
-        </p:style>
-        <p:txBody>
-          <a:bodyPr rtlCol="0" anchor="ctr"/>
-          <a:lstStyle/>
-          <a:p>
-            <a:pPr algn="ctr"/>
-          </a:p>
-        </p:txBody>
-      </p:sp>
-      <p:sp>
-        <p:nvSpPr>
-          <p:cNvPr id="14" name="TextBox 13"/>
-          <p:cNvSpPr txBox="1"/>
-          <p:nvPr/>
-        </p:nvSpPr>
-        <p:spPr>
-          <a:xfrm>
-            <a:off x="640080" y="2670048"/>
-            <a:ext cx="5029200" cy="365760"/>
-          </a:xfrm>
-          <a:prstGeom prst="rect">
-            <a:avLst/>
-          </a:prstGeom>
-          <a:noFill/>
-        </p:spPr>
-        <p:txBody>
-          <a:bodyPr wrap="none">
-            <a:spAutoFit/>
-          </a:bodyPr>
-          <a:lstStyle/>
-          <a:p>
-            <a:pPr algn="l">
-              <a:defRPr sz="2000" b="1">
-                <a:solidFill>
-                  <a:srgbClr val="C41E3A"/>
-                </a:solidFill>
-                <a:latin typeface="Arial"/>
-              </a:defRPr>
-            </a:pPr>
-            <a:r>
-              <a:t>beber</a:t>
-            </a:r>
-          </a:p>
-        </p:txBody>
-      </p:sp>
-      <p:sp>
-        <p:nvSpPr>
-          <p:cNvPr id="15" name="TextBox 14"/>
-          <p:cNvSpPr txBox="1"/>
-          <p:nvPr/>
-        </p:nvSpPr>
-        <p:spPr>
-          <a:xfrm>
-            <a:off x="5943600" y="2670048"/>
-            <a:ext cx="5029200" cy="365760"/>
-          </a:xfrm>
-          <a:prstGeom prst="rect">
-            <a:avLst/>
-          </a:prstGeom>
-          <a:noFill/>
-        </p:spPr>
-        <p:txBody>
-          <a:bodyPr wrap="none">
-            <a:spAutoFit/>
-          </a:bodyPr>
-          <a:lstStyle/>
-          <a:p>
-            <a:pPr algn="l">
-              <a:defRPr sz="2000" b="0">
-                <a:solidFill>
-                  <a:srgbClr val="222222"/>
-                </a:solidFill>
-                <a:latin typeface="Arial"/>
-              </a:defRPr>
-            </a:pPr>
-            <a:r>
-              <a:t>trinken</a:t>
-            </a:r>
-          </a:p>
-        </p:txBody>
-      </p:sp>
-      <p:sp>
-        <p:nvSpPr>
-          <p:cNvPr id="16" name="TextBox 15"/>
-          <p:cNvSpPr txBox="1"/>
-          <p:nvPr/>
-        </p:nvSpPr>
-        <p:spPr>
-          <a:xfrm>
-            <a:off x="640080" y="3264408"/>
-            <a:ext cx="5029200" cy="365760"/>
-          </a:xfrm>
-          <a:prstGeom prst="rect">
-            <a:avLst/>
-          </a:prstGeom>
-          <a:noFill/>
-        </p:spPr>
-        <p:txBody>
-          <a:bodyPr wrap="none">
-            <a:spAutoFit/>
-          </a:bodyPr>
-          <a:lstStyle/>
-          <a:p>
-            <a:pPr algn="l">
-              <a:defRPr sz="2000" b="1">
-                <a:solidFill>
-                  <a:srgbClr val="C41E3A"/>
-                </a:solidFill>
-                <a:latin typeface="Arial"/>
-              </a:defRPr>
-            </a:pPr>
-            <a:r>
-              <a:t>escribir</a:t>
-            </a:r>
-          </a:p>
-        </p:txBody>
-      </p:sp>
-      <p:sp>
-        <p:nvSpPr>
-          <p:cNvPr id="17" name="TextBox 16"/>
-          <p:cNvSpPr txBox="1"/>
-          <p:nvPr/>
-        </p:nvSpPr>
-        <p:spPr>
-          <a:xfrm>
-            <a:off x="5943600" y="3264408"/>
-            <a:ext cx="5029200" cy="365760"/>
-          </a:xfrm>
-          <a:prstGeom prst="rect">
-            <a:avLst/>
-          </a:prstGeom>
-          <a:noFill/>
-        </p:spPr>
-        <p:txBody>
-          <a:bodyPr wrap="none">
-            <a:spAutoFit/>
-          </a:bodyPr>
-          <a:lstStyle/>
-          <a:p>
-            <a:pPr algn="l">
-              <a:defRPr sz="2000" b="0">
-                <a:solidFill>
-                  <a:srgbClr val="222222"/>
-                </a:solidFill>
-                <a:latin typeface="Arial"/>
-              </a:defRPr>
-            </a:pPr>
-            <a:r>
-              <a:t>schreiben</a:t>
-            </a:r>
-          </a:p>
-        </p:txBody>
-      </p:sp>
-      <p:sp>
-        <p:nvSpPr>
-          <p:cNvPr id="18" name="Rectangle 17"/>
-          <p:cNvSpPr/>
-          <p:nvPr/>
-        </p:nvSpPr>
-        <p:spPr>
-          <a:xfrm>
-            <a:off x="457200" y="5943600"/>
-            <a:ext cx="11274552" cy="548640"/>
-          </a:xfrm>
-          <a:prstGeom prst="rect">
-            <a:avLst/>
-          </a:prstGeom>
-          <a:solidFill>
-            <a:srgbClr val="FDF2F4"/>
-          </a:solidFill>
-          <a:ln>
-            <a:solidFill>
-              <a:srgbClr val="C41E3A"/>
-            </a:solidFill>
-          </a:ln>
-        </p:spPr>
-        <p:style>
-          <a:lnRef idx="1">
-            <a:schemeClr val="accent1"/>
-          </a:lnRef>
-          <a:fillRef idx="3">
-            <a:schemeClr val="accent1"/>
-          </a:fillRef>
-          <a:effectRef idx="2">
-            <a:schemeClr val="accent1"/>
-          </a:effectRef>
-          <a:fontRef idx="minor">
-            <a:schemeClr val="lt1"/>
-          </a:fontRef>
-        </p:style>
-        <p:txBody>
-          <a:bodyPr rtlCol="0" anchor="ctr"/>
-          <a:lstStyle/>
-          <a:p>
-            <a:pPr algn="ctr"/>
-          </a:p>
-        </p:txBody>
-      </p:sp>
-      <p:sp>
-        <p:nvSpPr>
-          <p:cNvPr id="19" name="TextBox 18"/>
-          <p:cNvSpPr txBox="1"/>
-          <p:nvPr/>
-        </p:nvSpPr>
-        <p:spPr>
-          <a:xfrm>
-            <a:off x="640080" y="6053328"/>
-            <a:ext cx="10972800" cy="365760"/>
-          </a:xfrm>
-          <a:prstGeom prst="rect">
-            <a:avLst/>
-          </a:prstGeom>
-          <a:noFill/>
-        </p:spPr>
-        <p:txBody>
-          <a:bodyPr wrap="none">
-            <a:spAutoFit/>
-          </a:bodyPr>
-          <a:lstStyle/>
-          <a:p>
-            <a:pPr algn="l">
-              <a:defRPr sz="1400" b="1">
-                <a:solidFill>
-                  <a:srgbClr val="C41E3A"/>
-                </a:solidFill>
-                <a:latin typeface="Arial"/>
-              </a:defRPr>
-            </a:pPr>
-            <a:r>
-              <a:t>📝 AB-05b: Kasten 1</a:t>
+              <a:t>ellos comen</a:t>
+            </a:r>
+          </a:p>
+        </p:txBody>
+      </p:sp>
+      <p:sp>
+        <p:nvSpPr>
+          <p:cNvPr id="13" name="TextBox 12"/>
+          <p:cNvSpPr txBox="1"/>
+          <p:nvPr/>
+        </p:nvSpPr>
+        <p:spPr>
+          <a:xfrm>
+            <a:off x="5943600" y="3749039"/>
+            <a:ext cx="5486400" cy="548640"/>
+          </a:xfrm>
+          <a:prstGeom prst="rect">
+            <a:avLst/>
+          </a:prstGeom>
+          <a:noFill/>
+        </p:spPr>
+        <p:txBody>
+          <a:bodyPr wrap="none">
+            <a:spAutoFit/>
+          </a:bodyPr>
+          <a:lstStyle/>
+          <a:p>
+            <a:pPr algn="l">
+              <a:defRPr sz="1800" b="0">
+                <a:solidFill>
+                  <a:srgbClr val="555555"/>
+                </a:solidFill>
+                <a:latin typeface="Arial"/>
+              </a:defRPr>
+            </a:pPr>
+            <a:r>
+              <a:t>sie essen</a:t>
             </a:r>
           </a:p>
         </p:txBody>
@@ -5088,14 +7656,293 @@
       </p:sp>
       <p:sp>
         <p:nvSpPr>
-          <p:cNvPr id="7" name="Rectangle 6"/>
+          <p:cNvPr id="7" name="TextBox 6"/>
+          <p:cNvSpPr txBox="1"/>
+          <p:nvPr/>
+        </p:nvSpPr>
+        <p:spPr>
+          <a:xfrm>
+            <a:off x="457200" y="640080"/>
+            <a:ext cx="11274552" cy="731520"/>
+          </a:xfrm>
+          <a:prstGeom prst="rect">
+            <a:avLst/>
+          </a:prstGeom>
+          <a:noFill/>
+        </p:spPr>
+        <p:txBody>
+          <a:bodyPr wrap="none">
+            <a:spAutoFit/>
+          </a:bodyPr>
+          <a:lstStyle/>
+          <a:p>
+            <a:pPr algn="l">
+              <a:defRPr sz="3200" b="1">
+                <a:solidFill>
+                  <a:srgbClr val="C41E3A"/>
+                </a:solidFill>
+                <a:latin typeface="Arial"/>
+              </a:defRPr>
+            </a:pPr>
+            <a:r>
+              <a:t>📝 -er Endungen</a:t>
+            </a:r>
+          </a:p>
+        </p:txBody>
+      </p:sp>
+      <p:sp>
+        <p:nvSpPr>
+          <p:cNvPr id="8" name="TextBox 7"/>
+          <p:cNvSpPr txBox="1"/>
+          <p:nvPr/>
+        </p:nvSpPr>
+        <p:spPr>
+          <a:xfrm>
+            <a:off x="640080" y="1463040"/>
+            <a:ext cx="5029200" cy="731520"/>
+          </a:xfrm>
+          <a:prstGeom prst="rect">
+            <a:avLst/>
+          </a:prstGeom>
+          <a:noFill/>
+        </p:spPr>
+        <p:txBody>
+          <a:bodyPr wrap="none">
+            <a:spAutoFit/>
+          </a:bodyPr>
+          <a:lstStyle/>
+          <a:p>
+            <a:pPr algn="l">
+              <a:defRPr sz="2800" b="1">
+                <a:solidFill>
+                  <a:srgbClr val="C41E3A"/>
+                </a:solidFill>
+                <a:latin typeface="Arial"/>
+              </a:defRPr>
+            </a:pPr>
+            <a:r>
+              <a:t>-o, -es, -e</a:t>
+            </a:r>
+          </a:p>
+        </p:txBody>
+      </p:sp>
+      <p:sp>
+        <p:nvSpPr>
+          <p:cNvPr id="9" name="TextBox 8"/>
+          <p:cNvSpPr txBox="1"/>
+          <p:nvPr/>
+        </p:nvSpPr>
+        <p:spPr>
+          <a:xfrm>
+            <a:off x="5943600" y="1554480"/>
+            <a:ext cx="5486400" cy="548640"/>
+          </a:xfrm>
+          <a:prstGeom prst="rect">
+            <a:avLst/>
+          </a:prstGeom>
+          <a:noFill/>
+        </p:spPr>
+        <p:txBody>
+          <a:bodyPr wrap="none">
+            <a:spAutoFit/>
+          </a:bodyPr>
+          <a:lstStyle/>
+          <a:p>
+            <a:pPr algn="l">
+              <a:defRPr sz="1800" b="0">
+                <a:solidFill>
+                  <a:srgbClr val="555555"/>
+                </a:solidFill>
+                <a:latin typeface="Arial"/>
+              </a:defRPr>
+            </a:pPr>
+            <a:r>
+              <a:t>Singular</a:t>
+            </a:r>
+          </a:p>
+        </p:txBody>
+      </p:sp>
+      <p:sp>
+        <p:nvSpPr>
+          <p:cNvPr id="10" name="TextBox 9"/>
+          <p:cNvSpPr txBox="1"/>
+          <p:nvPr/>
+        </p:nvSpPr>
+        <p:spPr>
+          <a:xfrm>
+            <a:off x="640080" y="2560320"/>
+            <a:ext cx="5029200" cy="731520"/>
+          </a:xfrm>
+          <a:prstGeom prst="rect">
+            <a:avLst/>
+          </a:prstGeom>
+          <a:noFill/>
+        </p:spPr>
+        <p:txBody>
+          <a:bodyPr wrap="none">
+            <a:spAutoFit/>
+          </a:bodyPr>
+          <a:lstStyle/>
+          <a:p>
+            <a:pPr algn="l">
+              <a:defRPr sz="2800" b="1">
+                <a:solidFill>
+                  <a:srgbClr val="C41E3A"/>
+                </a:solidFill>
+                <a:latin typeface="Arial"/>
+              </a:defRPr>
+            </a:pPr>
+            <a:r>
+              <a:t>-emos, -éis, -en</a:t>
+            </a:r>
+          </a:p>
+        </p:txBody>
+      </p:sp>
+      <p:sp>
+        <p:nvSpPr>
+          <p:cNvPr id="11" name="TextBox 10"/>
+          <p:cNvSpPr txBox="1"/>
+          <p:nvPr/>
+        </p:nvSpPr>
+        <p:spPr>
+          <a:xfrm>
+            <a:off x="5943600" y="2651760"/>
+            <a:ext cx="5486400" cy="548640"/>
+          </a:xfrm>
+          <a:prstGeom prst="rect">
+            <a:avLst/>
+          </a:prstGeom>
+          <a:noFill/>
+        </p:spPr>
+        <p:txBody>
+          <a:bodyPr wrap="none">
+            <a:spAutoFit/>
+          </a:bodyPr>
+          <a:lstStyle/>
+          <a:p>
+            <a:pPr algn="l">
+              <a:defRPr sz="1800" b="0">
+                <a:solidFill>
+                  <a:srgbClr val="555555"/>
+                </a:solidFill>
+                <a:latin typeface="Arial"/>
+              </a:defRPr>
+            </a:pPr>
+            <a:r>
+              <a:t>Plural</a:t>
+            </a:r>
+          </a:p>
+        </p:txBody>
+      </p:sp>
+      <p:sp>
+        <p:nvSpPr>
+          <p:cNvPr id="12" name="Rectangle 11"/>
           <p:cNvSpPr/>
           <p:nvPr/>
         </p:nvSpPr>
         <p:spPr>
           <a:xfrm>
-            <a:off x="457200" y="640080"/>
-            <a:ext cx="1828800" cy="457200"/>
+            <a:off x="457200" y="5029200"/>
+            <a:ext cx="11274552" cy="1097280"/>
+          </a:xfrm>
+          <a:prstGeom prst="rect">
+            <a:avLst/>
+          </a:prstGeom>
+          <a:solidFill>
+            <a:srgbClr val="FFF8F0"/>
+          </a:solidFill>
+          <a:ln>
+            <a:solidFill>
+              <a:srgbClr val="B35C00"/>
+            </a:solidFill>
+          </a:ln>
+        </p:spPr>
+        <p:style>
+          <a:lnRef idx="1">
+            <a:schemeClr val="accent1"/>
+          </a:lnRef>
+          <a:fillRef idx="3">
+            <a:schemeClr val="accent1"/>
+          </a:fillRef>
+          <a:effectRef idx="2">
+            <a:schemeClr val="accent1"/>
+          </a:effectRef>
+          <a:fontRef idx="minor">
+            <a:schemeClr val="lt1"/>
+          </a:fontRef>
+        </p:style>
+        <p:txBody>
+          <a:bodyPr rtlCol="0" anchor="ctr"/>
+          <a:lstStyle/>
+          <a:p>
+            <a:pPr algn="ctr"/>
+          </a:p>
+        </p:txBody>
+      </p:sp>
+      <p:sp>
+        <p:nvSpPr>
+          <p:cNvPr id="13" name="TextBox 12"/>
+          <p:cNvSpPr txBox="1"/>
+          <p:nvPr/>
+        </p:nvSpPr>
+        <p:spPr>
+          <a:xfrm>
+            <a:off x="640080" y="5212080"/>
+            <a:ext cx="10972800" cy="731520"/>
+          </a:xfrm>
+          <a:prstGeom prst="rect">
+            <a:avLst/>
+          </a:prstGeom>
+          <a:noFill/>
+        </p:spPr>
+        <p:txBody>
+          <a:bodyPr wrap="none">
+            <a:spAutoFit/>
+          </a:bodyPr>
+          <a:lstStyle/>
+          <a:p>
+            <a:pPr algn="l">
+              <a:defRPr sz="1600" b="0">
+                <a:solidFill>
+                  <a:srgbClr val="222222"/>
+                </a:solidFill>
+                <a:latin typeface="Arial"/>
+              </a:defRPr>
+            </a:pPr>
+            <a:r>
+              <a:t>💡 Ähnlich wie -ar, aber -e- statt -a-</a:t>
+            </a:r>
+          </a:p>
+        </p:txBody>
+      </p:sp>
+    </p:spTree>
+  </p:cSld>
+  <p:clrMapOvr>
+    <a:masterClrMapping/>
+  </p:clrMapOvr>
+</p:sld>
+</file>
+
+<file path=ppt/slides/slide6.xml><?xml version="1.0" encoding="utf-8"?>
+<p:sld xmlns:a="http://schemas.openxmlformats.org/drawingml/2006/main" xmlns:p="http://schemas.openxmlformats.org/presentationml/2006/main" xmlns:r="http://schemas.openxmlformats.org/officeDocument/2006/relationships">
+  <p:cSld>
+    <p:spTree>
+      <p:nvGrpSpPr>
+        <p:cNvPr id="1" name=""/>
+        <p:cNvGrpSpPr/>
+        <p:nvPr/>
+      </p:nvGrpSpPr>
+      <p:grpSpPr/>
+      <p:sp>
+        <p:nvSpPr>
+          <p:cNvPr id="2" name="Rectangle 1"/>
+          <p:cNvSpPr/>
+          <p:nvPr/>
+        </p:nvSpPr>
+        <p:spPr>
+          <a:xfrm>
+            <a:off x="0" y="0"/>
+            <a:ext cx="12191695" cy="457200"/>
           </a:xfrm>
           <a:prstGeom prst="rect">
             <a:avLst/>
@@ -5131,27 +7978,491 @@
       </p:sp>
       <p:sp>
         <p:nvSpPr>
+          <p:cNvPr id="3" name="TextBox 2"/>
+          <p:cNvSpPr txBox="1"/>
+          <p:nvPr/>
+        </p:nvSpPr>
+        <p:spPr>
+          <a:xfrm>
+            <a:off x="274320" y="91440"/>
+            <a:ext cx="3657600" cy="274320"/>
+          </a:xfrm>
+          <a:prstGeom prst="rect">
+            <a:avLst/>
+          </a:prstGeom>
+          <a:noFill/>
+        </p:spPr>
+        <p:txBody>
+          <a:bodyPr wrap="none">
+            <a:spAutoFit/>
+          </a:bodyPr>
+          <a:lstStyle/>
+          <a:p>
+            <a:pPr algn="l">
+              <a:defRPr sz="1400" b="1">
+                <a:solidFill>
+                  <a:srgbClr val="FFFFFF"/>
+                </a:solidFill>
+                <a:latin typeface="Arial"/>
+              </a:defRPr>
+            </a:pPr>
+            <a:r>
+              <a:t>Spanisch Klasse 7 · LP-05b</a:t>
+            </a:r>
+          </a:p>
+        </p:txBody>
+      </p:sp>
+      <p:sp>
+        <p:nvSpPr>
+          <p:cNvPr id="4" name="Rectangle 3"/>
+          <p:cNvSpPr/>
+          <p:nvPr/>
+        </p:nvSpPr>
+        <p:spPr>
+          <a:xfrm>
+            <a:off x="0" y="6583680"/>
+            <a:ext cx="12191695" cy="274320"/>
+          </a:xfrm>
+          <a:prstGeom prst="rect">
+            <a:avLst/>
+          </a:prstGeom>
+          <a:solidFill>
+            <a:srgbClr val="F5F5F5"/>
+          </a:solidFill>
+          <a:ln>
+            <a:noFill/>
+          </a:ln>
+        </p:spPr>
+        <p:style>
+          <a:lnRef idx="1">
+            <a:schemeClr val="accent1"/>
+          </a:lnRef>
+          <a:fillRef idx="3">
+            <a:schemeClr val="accent1"/>
+          </a:fillRef>
+          <a:effectRef idx="2">
+            <a:schemeClr val="accent1"/>
+          </a:effectRef>
+          <a:fontRef idx="minor">
+            <a:schemeClr val="lt1"/>
+          </a:fontRef>
+        </p:style>
+        <p:txBody>
+          <a:bodyPr rtlCol="0" anchor="ctr"/>
+          <a:lstStyle/>
+          <a:p>
+            <a:pPr algn="ctr"/>
+          </a:p>
+        </p:txBody>
+      </p:sp>
+      <p:sp>
+        <p:nvSpPr>
+          <p:cNvPr id="5" name="TextBox 4"/>
+          <p:cNvSpPr txBox="1"/>
+          <p:nvPr/>
+        </p:nvSpPr>
+        <p:spPr>
+          <a:xfrm>
+            <a:off x="274320" y="6601968"/>
+            <a:ext cx="4572000" cy="228600"/>
+          </a:xfrm>
+          <a:prstGeom prst="rect">
+            <a:avLst/>
+          </a:prstGeom>
+          <a:noFill/>
+        </p:spPr>
+        <p:txBody>
+          <a:bodyPr wrap="none">
+            <a:spAutoFit/>
+          </a:bodyPr>
+          <a:lstStyle/>
+          <a:p>
+            <a:pPr algn="l">
+              <a:defRPr sz="1000" b="0">
+                <a:solidFill>
+                  <a:srgbClr val="555555"/>
+                </a:solidFill>
+                <a:latin typeface="Arial"/>
+              </a:defRPr>
+            </a:pPr>
+            <a:r>
+              <a:t>Verbos en -er/-ir</a:t>
+            </a:r>
+          </a:p>
+        </p:txBody>
+      </p:sp>
+      <p:sp>
+        <p:nvSpPr>
+          <p:cNvPr id="6" name="TextBox 5"/>
+          <p:cNvSpPr txBox="1"/>
+          <p:nvPr/>
+        </p:nvSpPr>
+        <p:spPr>
+          <a:xfrm>
+            <a:off x="9144000" y="6601968"/>
+            <a:ext cx="2743200" cy="228600"/>
+          </a:xfrm>
+          <a:prstGeom prst="rect">
+            <a:avLst/>
+          </a:prstGeom>
+          <a:noFill/>
+        </p:spPr>
+        <p:txBody>
+          <a:bodyPr wrap="none">
+            <a:spAutoFit/>
+          </a:bodyPr>
+          <a:lstStyle/>
+          <a:p>
+            <a:pPr algn="r">
+              <a:defRPr sz="1000" b="0">
+                <a:solidFill>
+                  <a:srgbClr val="555555"/>
+                </a:solidFill>
+                <a:latin typeface="Arial"/>
+              </a:defRPr>
+            </a:pPr>
+            <a:r>
+              <a:t>Sequenz 5</a:t>
+            </a:r>
+          </a:p>
+        </p:txBody>
+      </p:sp>
+      <p:sp>
+        <p:nvSpPr>
+          <p:cNvPr id="7" name="TextBox 6"/>
+          <p:cNvSpPr txBox="1"/>
+          <p:nvPr/>
+        </p:nvSpPr>
+        <p:spPr>
+          <a:xfrm>
+            <a:off x="457200" y="640080"/>
+            <a:ext cx="11274552" cy="731520"/>
+          </a:xfrm>
+          <a:prstGeom prst="rect">
+            <a:avLst/>
+          </a:prstGeom>
+          <a:noFill/>
+        </p:spPr>
+        <p:txBody>
+          <a:bodyPr wrap="none">
+            <a:spAutoFit/>
+          </a:bodyPr>
+          <a:lstStyle/>
+          <a:p>
+            <a:pPr algn="l">
+              <a:defRPr sz="3200" b="1">
+                <a:solidFill>
+                  <a:srgbClr val="C41E3A"/>
+                </a:solidFill>
+                <a:latin typeface="Arial"/>
+              </a:defRPr>
+            </a:pPr>
+            <a:r>
+              <a:t>📝 vivir (leben): Konjugation</a:t>
+            </a:r>
+          </a:p>
+        </p:txBody>
+      </p:sp>
+      <p:sp>
+        <p:nvSpPr>
           <p:cNvPr id="8" name="TextBox 7"/>
           <p:cNvSpPr txBox="1"/>
           <p:nvPr/>
         </p:nvSpPr>
         <p:spPr>
           <a:xfrm>
-            <a:off x="548640" y="713231"/>
-            <a:ext cx="1645920" cy="320040"/>
-          </a:xfrm>
-          <a:prstGeom prst="rect">
-            <a:avLst/>
-          </a:prstGeom>
-          <a:noFill/>
-        </p:spPr>
-        <p:txBody>
-          <a:bodyPr wrap="none">
-            <a:spAutoFit/>
-          </a:bodyPr>
-          <a:lstStyle/>
-          <a:p>
-            <a:pPr algn="ctr">
+            <a:off x="640080" y="1463040"/>
+            <a:ext cx="5029200" cy="731520"/>
+          </a:xfrm>
+          <a:prstGeom prst="rect">
+            <a:avLst/>
+          </a:prstGeom>
+          <a:noFill/>
+        </p:spPr>
+        <p:txBody>
+          <a:bodyPr wrap="none">
+            <a:spAutoFit/>
+          </a:bodyPr>
+          <a:lstStyle/>
+          <a:p>
+            <a:pPr algn="l">
+              <a:defRPr sz="2800" b="1">
+                <a:solidFill>
+                  <a:srgbClr val="C41E3A"/>
+                </a:solidFill>
+                <a:latin typeface="Arial"/>
+              </a:defRPr>
+            </a:pPr>
+            <a:r>
+              <a:t>yo vivo</a:t>
+            </a:r>
+          </a:p>
+        </p:txBody>
+      </p:sp>
+      <p:sp>
+        <p:nvSpPr>
+          <p:cNvPr id="9" name="TextBox 8"/>
+          <p:cNvSpPr txBox="1"/>
+          <p:nvPr/>
+        </p:nvSpPr>
+        <p:spPr>
+          <a:xfrm>
+            <a:off x="5943600" y="1554480"/>
+            <a:ext cx="5486400" cy="548640"/>
+          </a:xfrm>
+          <a:prstGeom prst="rect">
+            <a:avLst/>
+          </a:prstGeom>
+          <a:noFill/>
+        </p:spPr>
+        <p:txBody>
+          <a:bodyPr wrap="none">
+            <a:spAutoFit/>
+          </a:bodyPr>
+          <a:lstStyle/>
+          <a:p>
+            <a:pPr algn="l">
+              <a:defRPr sz="1800" b="0">
+                <a:solidFill>
+                  <a:srgbClr val="555555"/>
+                </a:solidFill>
+                <a:latin typeface="Arial"/>
+              </a:defRPr>
+            </a:pPr>
+            <a:r>
+              <a:t>ich lebe</a:t>
+            </a:r>
+          </a:p>
+        </p:txBody>
+      </p:sp>
+      <p:sp>
+        <p:nvSpPr>
+          <p:cNvPr id="10" name="TextBox 9"/>
+          <p:cNvSpPr txBox="1"/>
+          <p:nvPr/>
+        </p:nvSpPr>
+        <p:spPr>
+          <a:xfrm>
+            <a:off x="640080" y="2560320"/>
+            <a:ext cx="5029200" cy="731520"/>
+          </a:xfrm>
+          <a:prstGeom prst="rect">
+            <a:avLst/>
+          </a:prstGeom>
+          <a:noFill/>
+        </p:spPr>
+        <p:txBody>
+          <a:bodyPr wrap="none">
+            <a:spAutoFit/>
+          </a:bodyPr>
+          <a:lstStyle/>
+          <a:p>
+            <a:pPr algn="l">
+              <a:defRPr sz="2800" b="1">
+                <a:solidFill>
+                  <a:srgbClr val="C41E3A"/>
+                </a:solidFill>
+                <a:latin typeface="Arial"/>
+              </a:defRPr>
+            </a:pPr>
+            <a:r>
+              <a:t>tú vives</a:t>
+            </a:r>
+          </a:p>
+        </p:txBody>
+      </p:sp>
+      <p:sp>
+        <p:nvSpPr>
+          <p:cNvPr id="11" name="TextBox 10"/>
+          <p:cNvSpPr txBox="1"/>
+          <p:nvPr/>
+        </p:nvSpPr>
+        <p:spPr>
+          <a:xfrm>
+            <a:off x="5943600" y="2651760"/>
+            <a:ext cx="5486400" cy="548640"/>
+          </a:xfrm>
+          <a:prstGeom prst="rect">
+            <a:avLst/>
+          </a:prstGeom>
+          <a:noFill/>
+        </p:spPr>
+        <p:txBody>
+          <a:bodyPr wrap="none">
+            <a:spAutoFit/>
+          </a:bodyPr>
+          <a:lstStyle/>
+          <a:p>
+            <a:pPr algn="l">
+              <a:defRPr sz="1800" b="0">
+                <a:solidFill>
+                  <a:srgbClr val="555555"/>
+                </a:solidFill>
+                <a:latin typeface="Arial"/>
+              </a:defRPr>
+            </a:pPr>
+            <a:r>
+              <a:t>du lebst</a:t>
+            </a:r>
+          </a:p>
+        </p:txBody>
+      </p:sp>
+      <p:sp>
+        <p:nvSpPr>
+          <p:cNvPr id="12" name="TextBox 11"/>
+          <p:cNvSpPr txBox="1"/>
+          <p:nvPr/>
+        </p:nvSpPr>
+        <p:spPr>
+          <a:xfrm>
+            <a:off x="640080" y="3657600"/>
+            <a:ext cx="5029200" cy="731520"/>
+          </a:xfrm>
+          <a:prstGeom prst="rect">
+            <a:avLst/>
+          </a:prstGeom>
+          <a:noFill/>
+        </p:spPr>
+        <p:txBody>
+          <a:bodyPr wrap="none">
+            <a:spAutoFit/>
+          </a:bodyPr>
+          <a:lstStyle/>
+          <a:p>
+            <a:pPr algn="l">
+              <a:defRPr sz="2800" b="1">
+                <a:solidFill>
+                  <a:srgbClr val="C41E3A"/>
+                </a:solidFill>
+                <a:latin typeface="Arial"/>
+              </a:defRPr>
+            </a:pPr>
+            <a:r>
+              <a:t>él/ella vive</a:t>
+            </a:r>
+          </a:p>
+        </p:txBody>
+      </p:sp>
+      <p:sp>
+        <p:nvSpPr>
+          <p:cNvPr id="13" name="TextBox 12"/>
+          <p:cNvSpPr txBox="1"/>
+          <p:nvPr/>
+        </p:nvSpPr>
+        <p:spPr>
+          <a:xfrm>
+            <a:off x="5943600" y="3749039"/>
+            <a:ext cx="5486400" cy="548640"/>
+          </a:xfrm>
+          <a:prstGeom prst="rect">
+            <a:avLst/>
+          </a:prstGeom>
+          <a:noFill/>
+        </p:spPr>
+        <p:txBody>
+          <a:bodyPr wrap="none">
+            <a:spAutoFit/>
+          </a:bodyPr>
+          <a:lstStyle/>
+          <a:p>
+            <a:pPr algn="l">
+              <a:defRPr sz="1800" b="0">
+                <a:solidFill>
+                  <a:srgbClr val="555555"/>
+                </a:solidFill>
+                <a:latin typeface="Arial"/>
+              </a:defRPr>
+            </a:pPr>
+            <a:r>
+              <a:t>er/sie lebt</a:t>
+            </a:r>
+          </a:p>
+        </p:txBody>
+      </p:sp>
+    </p:spTree>
+  </p:cSld>
+  <p:clrMapOvr>
+    <a:masterClrMapping/>
+  </p:clrMapOvr>
+</p:sld>
+</file>
+
+<file path=ppt/slides/slide7.xml><?xml version="1.0" encoding="utf-8"?>
+<p:sld xmlns:a="http://schemas.openxmlformats.org/drawingml/2006/main" xmlns:p="http://schemas.openxmlformats.org/presentationml/2006/main" xmlns:r="http://schemas.openxmlformats.org/officeDocument/2006/relationships">
+  <p:cSld>
+    <p:spTree>
+      <p:nvGrpSpPr>
+        <p:cNvPr id="1" name=""/>
+        <p:cNvGrpSpPr/>
+        <p:nvPr/>
+      </p:nvGrpSpPr>
+      <p:grpSpPr/>
+      <p:sp>
+        <p:nvSpPr>
+          <p:cNvPr id="2" name="Rectangle 1"/>
+          <p:cNvSpPr/>
+          <p:nvPr/>
+        </p:nvSpPr>
+        <p:spPr>
+          <a:xfrm>
+            <a:off x="0" y="0"/>
+            <a:ext cx="12191695" cy="457200"/>
+          </a:xfrm>
+          <a:prstGeom prst="rect">
+            <a:avLst/>
+          </a:prstGeom>
+          <a:solidFill>
+            <a:srgbClr val="C41E3A"/>
+          </a:solidFill>
+          <a:ln>
+            <a:noFill/>
+          </a:ln>
+        </p:spPr>
+        <p:style>
+          <a:lnRef idx="1">
+            <a:schemeClr val="accent1"/>
+          </a:lnRef>
+          <a:fillRef idx="3">
+            <a:schemeClr val="accent1"/>
+          </a:fillRef>
+          <a:effectRef idx="2">
+            <a:schemeClr val="accent1"/>
+          </a:effectRef>
+          <a:fontRef idx="minor">
+            <a:schemeClr val="lt1"/>
+          </a:fontRef>
+        </p:style>
+        <p:txBody>
+          <a:bodyPr rtlCol="0" anchor="ctr"/>
+          <a:lstStyle/>
+          <a:p>
+            <a:pPr algn="ctr"/>
+          </a:p>
+        </p:txBody>
+      </p:sp>
+      <p:sp>
+        <p:nvSpPr>
+          <p:cNvPr id="3" name="TextBox 2"/>
+          <p:cNvSpPr txBox="1"/>
+          <p:nvPr/>
+        </p:nvSpPr>
+        <p:spPr>
+          <a:xfrm>
+            <a:off x="274320" y="91440"/>
+            <a:ext cx="3657600" cy="274320"/>
+          </a:xfrm>
+          <a:prstGeom prst="rect">
+            <a:avLst/>
+          </a:prstGeom>
+          <a:noFill/>
+        </p:spPr>
+        <p:txBody>
+          <a:bodyPr wrap="none">
+            <a:spAutoFit/>
+          </a:bodyPr>
+          <a:lstStyle/>
+          <a:p>
+            <a:pPr algn="l">
               <a:defRPr sz="1400" b="1">
                 <a:solidFill>
                   <a:srgbClr val="FFFFFF"/>
@@ -5160,7 +8471,194 @@
               </a:defRPr>
             </a:pPr>
             <a:r>
-              <a:t>HAUSAUFGABE</a:t>
+              <a:t>Spanisch Klasse 7 · LP-05b</a:t>
+            </a:r>
+          </a:p>
+        </p:txBody>
+      </p:sp>
+      <p:sp>
+        <p:nvSpPr>
+          <p:cNvPr id="4" name="Rectangle 3"/>
+          <p:cNvSpPr/>
+          <p:nvPr/>
+        </p:nvSpPr>
+        <p:spPr>
+          <a:xfrm>
+            <a:off x="0" y="6583680"/>
+            <a:ext cx="12191695" cy="274320"/>
+          </a:xfrm>
+          <a:prstGeom prst="rect">
+            <a:avLst/>
+          </a:prstGeom>
+          <a:solidFill>
+            <a:srgbClr val="F5F5F5"/>
+          </a:solidFill>
+          <a:ln>
+            <a:noFill/>
+          </a:ln>
+        </p:spPr>
+        <p:style>
+          <a:lnRef idx="1">
+            <a:schemeClr val="accent1"/>
+          </a:lnRef>
+          <a:fillRef idx="3">
+            <a:schemeClr val="accent1"/>
+          </a:fillRef>
+          <a:effectRef idx="2">
+            <a:schemeClr val="accent1"/>
+          </a:effectRef>
+          <a:fontRef idx="minor">
+            <a:schemeClr val="lt1"/>
+          </a:fontRef>
+        </p:style>
+        <p:txBody>
+          <a:bodyPr rtlCol="0" anchor="ctr"/>
+          <a:lstStyle/>
+          <a:p>
+            <a:pPr algn="ctr"/>
+          </a:p>
+        </p:txBody>
+      </p:sp>
+      <p:sp>
+        <p:nvSpPr>
+          <p:cNvPr id="5" name="TextBox 4"/>
+          <p:cNvSpPr txBox="1"/>
+          <p:nvPr/>
+        </p:nvSpPr>
+        <p:spPr>
+          <a:xfrm>
+            <a:off x="274320" y="6601968"/>
+            <a:ext cx="4572000" cy="228600"/>
+          </a:xfrm>
+          <a:prstGeom prst="rect">
+            <a:avLst/>
+          </a:prstGeom>
+          <a:noFill/>
+        </p:spPr>
+        <p:txBody>
+          <a:bodyPr wrap="none">
+            <a:spAutoFit/>
+          </a:bodyPr>
+          <a:lstStyle/>
+          <a:p>
+            <a:pPr algn="l">
+              <a:defRPr sz="1000" b="0">
+                <a:solidFill>
+                  <a:srgbClr val="555555"/>
+                </a:solidFill>
+                <a:latin typeface="Arial"/>
+              </a:defRPr>
+            </a:pPr>
+            <a:r>
+              <a:t>Verbos en -er/-ir</a:t>
+            </a:r>
+          </a:p>
+        </p:txBody>
+      </p:sp>
+      <p:sp>
+        <p:nvSpPr>
+          <p:cNvPr id="6" name="TextBox 5"/>
+          <p:cNvSpPr txBox="1"/>
+          <p:nvPr/>
+        </p:nvSpPr>
+        <p:spPr>
+          <a:xfrm>
+            <a:off x="9144000" y="6601968"/>
+            <a:ext cx="2743200" cy="228600"/>
+          </a:xfrm>
+          <a:prstGeom prst="rect">
+            <a:avLst/>
+          </a:prstGeom>
+          <a:noFill/>
+        </p:spPr>
+        <p:txBody>
+          <a:bodyPr wrap="none">
+            <a:spAutoFit/>
+          </a:bodyPr>
+          <a:lstStyle/>
+          <a:p>
+            <a:pPr algn="r">
+              <a:defRPr sz="1000" b="0">
+                <a:solidFill>
+                  <a:srgbClr val="555555"/>
+                </a:solidFill>
+                <a:latin typeface="Arial"/>
+              </a:defRPr>
+            </a:pPr>
+            <a:r>
+              <a:t>Sequenz 5</a:t>
+            </a:r>
+          </a:p>
+        </p:txBody>
+      </p:sp>
+      <p:sp>
+        <p:nvSpPr>
+          <p:cNvPr id="7" name="TextBox 6"/>
+          <p:cNvSpPr txBox="1"/>
+          <p:nvPr/>
+        </p:nvSpPr>
+        <p:spPr>
+          <a:xfrm>
+            <a:off x="457200" y="640080"/>
+            <a:ext cx="11274552" cy="731520"/>
+          </a:xfrm>
+          <a:prstGeom prst="rect">
+            <a:avLst/>
+          </a:prstGeom>
+          <a:noFill/>
+        </p:spPr>
+        <p:txBody>
+          <a:bodyPr wrap="none">
+            <a:spAutoFit/>
+          </a:bodyPr>
+          <a:lstStyle/>
+          <a:p>
+            <a:pPr algn="l">
+              <a:defRPr sz="3200" b="1">
+                <a:solidFill>
+                  <a:srgbClr val="C41E3A"/>
+                </a:solidFill>
+                <a:latin typeface="Arial"/>
+              </a:defRPr>
+            </a:pPr>
+            <a:r>
+              <a:t>📝 -ir Endungen</a:t>
+            </a:r>
+          </a:p>
+        </p:txBody>
+      </p:sp>
+      <p:sp>
+        <p:nvSpPr>
+          <p:cNvPr id="8" name="TextBox 7"/>
+          <p:cNvSpPr txBox="1"/>
+          <p:nvPr/>
+        </p:nvSpPr>
+        <p:spPr>
+          <a:xfrm>
+            <a:off x="640080" y="1463040"/>
+            <a:ext cx="5029200" cy="731520"/>
+          </a:xfrm>
+          <a:prstGeom prst="rect">
+            <a:avLst/>
+          </a:prstGeom>
+          <a:noFill/>
+        </p:spPr>
+        <p:txBody>
+          <a:bodyPr wrap="none">
+            <a:spAutoFit/>
+          </a:bodyPr>
+          <a:lstStyle/>
+          <a:p>
+            <a:pPr algn="l">
+              <a:defRPr sz="2800" b="1">
+                <a:solidFill>
+                  <a:srgbClr val="C41E3A"/>
+                </a:solidFill>
+                <a:latin typeface="Arial"/>
+              </a:defRPr>
+            </a:pPr>
+            <a:r>
+              <a:t>-o, -es, -e</a:t>
             </a:r>
           </a:p>
         </p:txBody>
@@ -5173,7 +8671,408 @@
         </p:nvSpPr>
         <p:spPr>
           <a:xfrm>
-            <a:off x="457200" y="1280160"/>
+            <a:off x="5943600" y="1554480"/>
+            <a:ext cx="5486400" cy="548640"/>
+          </a:xfrm>
+          <a:prstGeom prst="rect">
+            <a:avLst/>
+          </a:prstGeom>
+          <a:noFill/>
+        </p:spPr>
+        <p:txBody>
+          <a:bodyPr wrap="none">
+            <a:spAutoFit/>
+          </a:bodyPr>
+          <a:lstStyle/>
+          <a:p>
+            <a:pPr algn="l">
+              <a:defRPr sz="1800" b="0">
+                <a:solidFill>
+                  <a:srgbClr val="555555"/>
+                </a:solidFill>
+                <a:latin typeface="Arial"/>
+              </a:defRPr>
+            </a:pPr>
+            <a:r>
+              <a:t>Singular</a:t>
+            </a:r>
+          </a:p>
+        </p:txBody>
+      </p:sp>
+      <p:sp>
+        <p:nvSpPr>
+          <p:cNvPr id="10" name="TextBox 9"/>
+          <p:cNvSpPr txBox="1"/>
+          <p:nvPr/>
+        </p:nvSpPr>
+        <p:spPr>
+          <a:xfrm>
+            <a:off x="640080" y="2560320"/>
+            <a:ext cx="5029200" cy="731520"/>
+          </a:xfrm>
+          <a:prstGeom prst="rect">
+            <a:avLst/>
+          </a:prstGeom>
+          <a:noFill/>
+        </p:spPr>
+        <p:txBody>
+          <a:bodyPr wrap="none">
+            <a:spAutoFit/>
+          </a:bodyPr>
+          <a:lstStyle/>
+          <a:p>
+            <a:pPr algn="l">
+              <a:defRPr sz="2800" b="1">
+                <a:solidFill>
+                  <a:srgbClr val="C41E3A"/>
+                </a:solidFill>
+                <a:latin typeface="Arial"/>
+              </a:defRPr>
+            </a:pPr>
+            <a:r>
+              <a:t>-imos, -ís, -en</a:t>
+            </a:r>
+          </a:p>
+        </p:txBody>
+      </p:sp>
+      <p:sp>
+        <p:nvSpPr>
+          <p:cNvPr id="11" name="TextBox 10"/>
+          <p:cNvSpPr txBox="1"/>
+          <p:nvPr/>
+        </p:nvSpPr>
+        <p:spPr>
+          <a:xfrm>
+            <a:off x="5943600" y="2651760"/>
+            <a:ext cx="5486400" cy="548640"/>
+          </a:xfrm>
+          <a:prstGeom prst="rect">
+            <a:avLst/>
+          </a:prstGeom>
+          <a:noFill/>
+        </p:spPr>
+        <p:txBody>
+          <a:bodyPr wrap="none">
+            <a:spAutoFit/>
+          </a:bodyPr>
+          <a:lstStyle/>
+          <a:p>
+            <a:pPr algn="l">
+              <a:defRPr sz="1800" b="0">
+                <a:solidFill>
+                  <a:srgbClr val="555555"/>
+                </a:solidFill>
+                <a:latin typeface="Arial"/>
+              </a:defRPr>
+            </a:pPr>
+            <a:r>
+              <a:t>Plural</a:t>
+            </a:r>
+          </a:p>
+        </p:txBody>
+      </p:sp>
+      <p:sp>
+        <p:nvSpPr>
+          <p:cNvPr id="12" name="Rectangle 11"/>
+          <p:cNvSpPr/>
+          <p:nvPr/>
+        </p:nvSpPr>
+        <p:spPr>
+          <a:xfrm>
+            <a:off x="457200" y="5029200"/>
+            <a:ext cx="11274552" cy="1097280"/>
+          </a:xfrm>
+          <a:prstGeom prst="rect">
+            <a:avLst/>
+          </a:prstGeom>
+          <a:solidFill>
+            <a:srgbClr val="FFF8F0"/>
+          </a:solidFill>
+          <a:ln>
+            <a:solidFill>
+              <a:srgbClr val="B35C00"/>
+            </a:solidFill>
+          </a:ln>
+        </p:spPr>
+        <p:style>
+          <a:lnRef idx="1">
+            <a:schemeClr val="accent1"/>
+          </a:lnRef>
+          <a:fillRef idx="3">
+            <a:schemeClr val="accent1"/>
+          </a:fillRef>
+          <a:effectRef idx="2">
+            <a:schemeClr val="accent1"/>
+          </a:effectRef>
+          <a:fontRef idx="minor">
+            <a:schemeClr val="lt1"/>
+          </a:fontRef>
+        </p:style>
+        <p:txBody>
+          <a:bodyPr rtlCol="0" anchor="ctr"/>
+          <a:lstStyle/>
+          <a:p>
+            <a:pPr algn="ctr"/>
+          </a:p>
+        </p:txBody>
+      </p:sp>
+      <p:sp>
+        <p:nvSpPr>
+          <p:cNvPr id="13" name="TextBox 12"/>
+          <p:cNvSpPr txBox="1"/>
+          <p:nvPr/>
+        </p:nvSpPr>
+        <p:spPr>
+          <a:xfrm>
+            <a:off x="640080" y="5212080"/>
+            <a:ext cx="10972800" cy="731520"/>
+          </a:xfrm>
+          <a:prstGeom prst="rect">
+            <a:avLst/>
+          </a:prstGeom>
+          <a:noFill/>
+        </p:spPr>
+        <p:txBody>
+          <a:bodyPr wrap="none">
+            <a:spAutoFit/>
+          </a:bodyPr>
+          <a:lstStyle/>
+          <a:p>
+            <a:pPr algn="l">
+              <a:defRPr sz="1600" b="0">
+                <a:solidFill>
+                  <a:srgbClr val="222222"/>
+                </a:solidFill>
+                <a:latin typeface="Arial"/>
+              </a:defRPr>
+            </a:pPr>
+            <a:r>
+              <a:t>💡 Fast wie -er, nur 1./2. Pl. anders</a:t>
+            </a:r>
+          </a:p>
+        </p:txBody>
+      </p:sp>
+    </p:spTree>
+  </p:cSld>
+  <p:clrMapOvr>
+    <a:masterClrMapping/>
+  </p:clrMapOvr>
+</p:sld>
+</file>
+
+<file path=ppt/slides/slide8.xml><?xml version="1.0" encoding="utf-8"?>
+<p:sld xmlns:a="http://schemas.openxmlformats.org/drawingml/2006/main" xmlns:p="http://schemas.openxmlformats.org/presentationml/2006/main" xmlns:r="http://schemas.openxmlformats.org/officeDocument/2006/relationships">
+  <p:cSld>
+    <p:spTree>
+      <p:nvGrpSpPr>
+        <p:cNvPr id="1" name=""/>
+        <p:cNvGrpSpPr/>
+        <p:nvPr/>
+      </p:nvGrpSpPr>
+      <p:grpSpPr/>
+      <p:sp>
+        <p:nvSpPr>
+          <p:cNvPr id="2" name="Rectangle 1"/>
+          <p:cNvSpPr/>
+          <p:nvPr/>
+        </p:nvSpPr>
+        <p:spPr>
+          <a:xfrm>
+            <a:off x="0" y="0"/>
+            <a:ext cx="12191695" cy="457200"/>
+          </a:xfrm>
+          <a:prstGeom prst="rect">
+            <a:avLst/>
+          </a:prstGeom>
+          <a:solidFill>
+            <a:srgbClr val="C41E3A"/>
+          </a:solidFill>
+          <a:ln>
+            <a:noFill/>
+          </a:ln>
+        </p:spPr>
+        <p:style>
+          <a:lnRef idx="1">
+            <a:schemeClr val="accent1"/>
+          </a:lnRef>
+          <a:fillRef idx="3">
+            <a:schemeClr val="accent1"/>
+          </a:fillRef>
+          <a:effectRef idx="2">
+            <a:schemeClr val="accent1"/>
+          </a:effectRef>
+          <a:fontRef idx="minor">
+            <a:schemeClr val="lt1"/>
+          </a:fontRef>
+        </p:style>
+        <p:txBody>
+          <a:bodyPr rtlCol="0" anchor="ctr"/>
+          <a:lstStyle/>
+          <a:p>
+            <a:pPr algn="ctr"/>
+          </a:p>
+        </p:txBody>
+      </p:sp>
+      <p:sp>
+        <p:nvSpPr>
+          <p:cNvPr id="3" name="TextBox 2"/>
+          <p:cNvSpPr txBox="1"/>
+          <p:nvPr/>
+        </p:nvSpPr>
+        <p:spPr>
+          <a:xfrm>
+            <a:off x="274320" y="91440"/>
+            <a:ext cx="3657600" cy="274320"/>
+          </a:xfrm>
+          <a:prstGeom prst="rect">
+            <a:avLst/>
+          </a:prstGeom>
+          <a:noFill/>
+        </p:spPr>
+        <p:txBody>
+          <a:bodyPr wrap="none">
+            <a:spAutoFit/>
+          </a:bodyPr>
+          <a:lstStyle/>
+          <a:p>
+            <a:pPr algn="l">
+              <a:defRPr sz="1400" b="1">
+                <a:solidFill>
+                  <a:srgbClr val="FFFFFF"/>
+                </a:solidFill>
+                <a:latin typeface="Arial"/>
+              </a:defRPr>
+            </a:pPr>
+            <a:r>
+              <a:t>Spanisch Klasse 7 · LP-05b</a:t>
+            </a:r>
+          </a:p>
+        </p:txBody>
+      </p:sp>
+      <p:sp>
+        <p:nvSpPr>
+          <p:cNvPr id="4" name="Rectangle 3"/>
+          <p:cNvSpPr/>
+          <p:nvPr/>
+        </p:nvSpPr>
+        <p:spPr>
+          <a:xfrm>
+            <a:off x="0" y="6583680"/>
+            <a:ext cx="12191695" cy="274320"/>
+          </a:xfrm>
+          <a:prstGeom prst="rect">
+            <a:avLst/>
+          </a:prstGeom>
+          <a:solidFill>
+            <a:srgbClr val="F5F5F5"/>
+          </a:solidFill>
+          <a:ln>
+            <a:noFill/>
+          </a:ln>
+        </p:spPr>
+        <p:style>
+          <a:lnRef idx="1">
+            <a:schemeClr val="accent1"/>
+          </a:lnRef>
+          <a:fillRef idx="3">
+            <a:schemeClr val="accent1"/>
+          </a:fillRef>
+          <a:effectRef idx="2">
+            <a:schemeClr val="accent1"/>
+          </a:effectRef>
+          <a:fontRef idx="minor">
+            <a:schemeClr val="lt1"/>
+          </a:fontRef>
+        </p:style>
+        <p:txBody>
+          <a:bodyPr rtlCol="0" anchor="ctr"/>
+          <a:lstStyle/>
+          <a:p>
+            <a:pPr algn="ctr"/>
+          </a:p>
+        </p:txBody>
+      </p:sp>
+      <p:sp>
+        <p:nvSpPr>
+          <p:cNvPr id="5" name="TextBox 4"/>
+          <p:cNvSpPr txBox="1"/>
+          <p:nvPr/>
+        </p:nvSpPr>
+        <p:spPr>
+          <a:xfrm>
+            <a:off x="274320" y="6601968"/>
+            <a:ext cx="4572000" cy="228600"/>
+          </a:xfrm>
+          <a:prstGeom prst="rect">
+            <a:avLst/>
+          </a:prstGeom>
+          <a:noFill/>
+        </p:spPr>
+        <p:txBody>
+          <a:bodyPr wrap="none">
+            <a:spAutoFit/>
+          </a:bodyPr>
+          <a:lstStyle/>
+          <a:p>
+            <a:pPr algn="l">
+              <a:defRPr sz="1000" b="0">
+                <a:solidFill>
+                  <a:srgbClr val="555555"/>
+                </a:solidFill>
+                <a:latin typeface="Arial"/>
+              </a:defRPr>
+            </a:pPr>
+            <a:r>
+              <a:t>Verbos en -er/-ir</a:t>
+            </a:r>
+          </a:p>
+        </p:txBody>
+      </p:sp>
+      <p:sp>
+        <p:nvSpPr>
+          <p:cNvPr id="6" name="TextBox 5"/>
+          <p:cNvSpPr txBox="1"/>
+          <p:nvPr/>
+        </p:nvSpPr>
+        <p:spPr>
+          <a:xfrm>
+            <a:off x="9144000" y="6601968"/>
+            <a:ext cx="2743200" cy="228600"/>
+          </a:xfrm>
+          <a:prstGeom prst="rect">
+            <a:avLst/>
+          </a:prstGeom>
+          <a:noFill/>
+        </p:spPr>
+        <p:txBody>
+          <a:bodyPr wrap="none">
+            <a:spAutoFit/>
+          </a:bodyPr>
+          <a:lstStyle/>
+          <a:p>
+            <a:pPr algn="r">
+              <a:defRPr sz="1000" b="0">
+                <a:solidFill>
+                  <a:srgbClr val="555555"/>
+                </a:solidFill>
+                <a:latin typeface="Arial"/>
+              </a:defRPr>
+            </a:pPr>
+            <a:r>
+              <a:t>Sequenz 5</a:t>
+            </a:r>
+          </a:p>
+        </p:txBody>
+      </p:sp>
+      <p:sp>
+        <p:nvSpPr>
+          <p:cNvPr id="7" name="TextBox 6"/>
+          <p:cNvSpPr txBox="1"/>
+          <p:nvPr/>
+        </p:nvSpPr>
+        <p:spPr>
+          <a:xfrm>
+            <a:off x="457200" y="640080"/>
             <a:ext cx="11274552" cy="731520"/>
           </a:xfrm>
           <a:prstGeom prst="rect">
@@ -5196,7 +9095,86 @@
               </a:defRPr>
             </a:pPr>
             <a:r>
-              <a:t>📚 Para casa</a:t>
+              <a:t>📚 -er-Verben</a:t>
+            </a:r>
+          </a:p>
+        </p:txBody>
+      </p:sp>
+      <p:sp>
+        <p:nvSpPr>
+          <p:cNvPr id="8" name="Rectangle 7"/>
+          <p:cNvSpPr/>
+          <p:nvPr/>
+        </p:nvSpPr>
+        <p:spPr>
+          <a:xfrm>
+            <a:off x="457200" y="1371600"/>
+            <a:ext cx="11274552" cy="594360"/>
+          </a:xfrm>
+          <a:prstGeom prst="rect">
+            <a:avLst/>
+          </a:prstGeom>
+          <a:solidFill>
+            <a:srgbClr val="C41E3A"/>
+          </a:solidFill>
+          <a:ln>
+            <a:noFill/>
+          </a:ln>
+        </p:spPr>
+        <p:style>
+          <a:lnRef idx="1">
+            <a:schemeClr val="accent1"/>
+          </a:lnRef>
+          <a:fillRef idx="3">
+            <a:schemeClr val="accent1"/>
+          </a:fillRef>
+          <a:effectRef idx="2">
+            <a:schemeClr val="accent1"/>
+          </a:effectRef>
+          <a:fontRef idx="minor">
+            <a:schemeClr val="lt1"/>
+          </a:fontRef>
+        </p:style>
+        <p:txBody>
+          <a:bodyPr rtlCol="0" anchor="ctr"/>
+          <a:lstStyle/>
+          <a:p>
+            <a:pPr algn="ctr"/>
+          </a:p>
+        </p:txBody>
+      </p:sp>
+      <p:sp>
+        <p:nvSpPr>
+          <p:cNvPr id="9" name="TextBox 8"/>
+          <p:cNvSpPr txBox="1"/>
+          <p:nvPr/>
+        </p:nvSpPr>
+        <p:spPr>
+          <a:xfrm>
+            <a:off x="640080" y="1481328"/>
+            <a:ext cx="5029200" cy="365760"/>
+          </a:xfrm>
+          <a:prstGeom prst="rect">
+            <a:avLst/>
+          </a:prstGeom>
+          <a:noFill/>
+        </p:spPr>
+        <p:txBody>
+          <a:bodyPr wrap="none">
+            <a:spAutoFit/>
+          </a:bodyPr>
+          <a:lstStyle/>
+          <a:p>
+            <a:pPr algn="l">
+              <a:defRPr sz="1800" b="1">
+                <a:solidFill>
+                  <a:srgbClr val="FFFFFF"/>
+                </a:solidFill>
+                <a:latin typeface="Arial"/>
+              </a:defRPr>
+            </a:pPr>
+            <a:r>
+              <a:t>Spanisch</a:t>
             </a:r>
           </a:p>
         </p:txBody>
@@ -5209,30 +9187,30 @@
         </p:nvSpPr>
         <p:spPr>
           <a:xfrm>
-            <a:off x="640080" y="2103120"/>
-            <a:ext cx="457200" cy="457200"/>
-          </a:xfrm>
-          <a:prstGeom prst="rect">
-            <a:avLst/>
-          </a:prstGeom>
-          <a:noFill/>
-        </p:spPr>
-        <p:txBody>
-          <a:bodyPr wrap="none">
-            <a:spAutoFit/>
-          </a:bodyPr>
-          <a:lstStyle/>
-          <a:p>
-            <a:pPr algn="l">
-              <a:defRPr sz="2400" b="1">
-                <a:solidFill>
-                  <a:srgbClr val="2A7A4B"/>
-                </a:solidFill>
-                <a:latin typeface="Arial"/>
-              </a:defRPr>
-            </a:pPr>
-            <a:r>
-              <a:t>✓</a:t>
+            <a:off x="5943600" y="1481328"/>
+            <a:ext cx="5029200" cy="365760"/>
+          </a:xfrm>
+          <a:prstGeom prst="rect">
+            <a:avLst/>
+          </a:prstGeom>
+          <a:noFill/>
+        </p:spPr>
+        <p:txBody>
+          <a:bodyPr wrap="none">
+            <a:spAutoFit/>
+          </a:bodyPr>
+          <a:lstStyle/>
+          <a:p>
+            <a:pPr algn="l">
+              <a:defRPr sz="1800" b="1">
+                <a:solidFill>
+                  <a:srgbClr val="FFFFFF"/>
+                </a:solidFill>
+                <a:latin typeface="Arial"/>
+              </a:defRPr>
+            </a:pPr>
+            <a:r>
+              <a:t>Deutsch</a:t>
             </a:r>
           </a:p>
         </p:txBody>
@@ -5245,8 +9223,44 @@
         </p:nvSpPr>
         <p:spPr>
           <a:xfrm>
-            <a:off x="1188720" y="2103120"/>
-            <a:ext cx="10058400" cy="457200"/>
+            <a:off x="640080" y="2075688"/>
+            <a:ext cx="5029200" cy="365760"/>
+          </a:xfrm>
+          <a:prstGeom prst="rect">
+            <a:avLst/>
+          </a:prstGeom>
+          <a:noFill/>
+        </p:spPr>
+        <p:txBody>
+          <a:bodyPr wrap="none">
+            <a:spAutoFit/>
+          </a:bodyPr>
+          <a:lstStyle/>
+          <a:p>
+            <a:pPr algn="l">
+              <a:defRPr sz="2000" b="1">
+                <a:solidFill>
+                  <a:srgbClr val="C41E3A"/>
+                </a:solidFill>
+                <a:latin typeface="Arial"/>
+              </a:defRPr>
+            </a:pPr>
+            <a:r>
+              <a:t>comer</a:t>
+            </a:r>
+          </a:p>
+        </p:txBody>
+      </p:sp>
+      <p:sp>
+        <p:nvSpPr>
+          <p:cNvPr id="12" name="TextBox 11"/>
+          <p:cNvSpPr txBox="1"/>
+          <p:nvPr/>
+        </p:nvSpPr>
+        <p:spPr>
+          <a:xfrm>
+            <a:off x="5943600" y="2075688"/>
+            <a:ext cx="5029200" cy="365760"/>
           </a:xfrm>
           <a:prstGeom prst="rect">
             <a:avLst/>
@@ -5268,7 +9282,789 @@
               </a:defRPr>
             </a:pPr>
             <a:r>
-              <a:t>-er/-ir-Endungen lernen</a:t>
+              <a:t>essen</a:t>
+            </a:r>
+          </a:p>
+        </p:txBody>
+      </p:sp>
+      <p:sp>
+        <p:nvSpPr>
+          <p:cNvPr id="13" name="Rectangle 12"/>
+          <p:cNvSpPr/>
+          <p:nvPr/>
+        </p:nvSpPr>
+        <p:spPr>
+          <a:xfrm>
+            <a:off x="457200" y="2560320"/>
+            <a:ext cx="11274552" cy="594360"/>
+          </a:xfrm>
+          <a:prstGeom prst="rect">
+            <a:avLst/>
+          </a:prstGeom>
+          <a:solidFill>
+            <a:srgbClr val="F5F5F5"/>
+          </a:solidFill>
+          <a:ln>
+            <a:noFill/>
+          </a:ln>
+        </p:spPr>
+        <p:style>
+          <a:lnRef idx="1">
+            <a:schemeClr val="accent1"/>
+          </a:lnRef>
+          <a:fillRef idx="3">
+            <a:schemeClr val="accent1"/>
+          </a:fillRef>
+          <a:effectRef idx="2">
+            <a:schemeClr val="accent1"/>
+          </a:effectRef>
+          <a:fontRef idx="minor">
+            <a:schemeClr val="lt1"/>
+          </a:fontRef>
+        </p:style>
+        <p:txBody>
+          <a:bodyPr rtlCol="0" anchor="ctr"/>
+          <a:lstStyle/>
+          <a:p>
+            <a:pPr algn="ctr"/>
+          </a:p>
+        </p:txBody>
+      </p:sp>
+      <p:sp>
+        <p:nvSpPr>
+          <p:cNvPr id="14" name="TextBox 13"/>
+          <p:cNvSpPr txBox="1"/>
+          <p:nvPr/>
+        </p:nvSpPr>
+        <p:spPr>
+          <a:xfrm>
+            <a:off x="640080" y="2670048"/>
+            <a:ext cx="5029200" cy="365760"/>
+          </a:xfrm>
+          <a:prstGeom prst="rect">
+            <a:avLst/>
+          </a:prstGeom>
+          <a:noFill/>
+        </p:spPr>
+        <p:txBody>
+          <a:bodyPr wrap="none">
+            <a:spAutoFit/>
+          </a:bodyPr>
+          <a:lstStyle/>
+          <a:p>
+            <a:pPr algn="l">
+              <a:defRPr sz="2000" b="1">
+                <a:solidFill>
+                  <a:srgbClr val="C41E3A"/>
+                </a:solidFill>
+                <a:latin typeface="Arial"/>
+              </a:defRPr>
+            </a:pPr>
+            <a:r>
+              <a:t>beber</a:t>
+            </a:r>
+          </a:p>
+        </p:txBody>
+      </p:sp>
+      <p:sp>
+        <p:nvSpPr>
+          <p:cNvPr id="15" name="TextBox 14"/>
+          <p:cNvSpPr txBox="1"/>
+          <p:nvPr/>
+        </p:nvSpPr>
+        <p:spPr>
+          <a:xfrm>
+            <a:off x="5943600" y="2670048"/>
+            <a:ext cx="5029200" cy="365760"/>
+          </a:xfrm>
+          <a:prstGeom prst="rect">
+            <a:avLst/>
+          </a:prstGeom>
+          <a:noFill/>
+        </p:spPr>
+        <p:txBody>
+          <a:bodyPr wrap="none">
+            <a:spAutoFit/>
+          </a:bodyPr>
+          <a:lstStyle/>
+          <a:p>
+            <a:pPr algn="l">
+              <a:defRPr sz="2000" b="0">
+                <a:solidFill>
+                  <a:srgbClr val="222222"/>
+                </a:solidFill>
+                <a:latin typeface="Arial"/>
+              </a:defRPr>
+            </a:pPr>
+            <a:r>
+              <a:t>trinken</a:t>
+            </a:r>
+          </a:p>
+        </p:txBody>
+      </p:sp>
+      <p:sp>
+        <p:nvSpPr>
+          <p:cNvPr id="16" name="TextBox 15"/>
+          <p:cNvSpPr txBox="1"/>
+          <p:nvPr/>
+        </p:nvSpPr>
+        <p:spPr>
+          <a:xfrm>
+            <a:off x="640080" y="3264408"/>
+            <a:ext cx="5029200" cy="365760"/>
+          </a:xfrm>
+          <a:prstGeom prst="rect">
+            <a:avLst/>
+          </a:prstGeom>
+          <a:noFill/>
+        </p:spPr>
+        <p:txBody>
+          <a:bodyPr wrap="none">
+            <a:spAutoFit/>
+          </a:bodyPr>
+          <a:lstStyle/>
+          <a:p>
+            <a:pPr algn="l">
+              <a:defRPr sz="2000" b="1">
+                <a:solidFill>
+                  <a:srgbClr val="C41E3A"/>
+                </a:solidFill>
+                <a:latin typeface="Arial"/>
+              </a:defRPr>
+            </a:pPr>
+            <a:r>
+              <a:t>leer</a:t>
+            </a:r>
+          </a:p>
+        </p:txBody>
+      </p:sp>
+      <p:sp>
+        <p:nvSpPr>
+          <p:cNvPr id="17" name="TextBox 16"/>
+          <p:cNvSpPr txBox="1"/>
+          <p:nvPr/>
+        </p:nvSpPr>
+        <p:spPr>
+          <a:xfrm>
+            <a:off x="5943600" y="3264408"/>
+            <a:ext cx="5029200" cy="365760"/>
+          </a:xfrm>
+          <a:prstGeom prst="rect">
+            <a:avLst/>
+          </a:prstGeom>
+          <a:noFill/>
+        </p:spPr>
+        <p:txBody>
+          <a:bodyPr wrap="none">
+            <a:spAutoFit/>
+          </a:bodyPr>
+          <a:lstStyle/>
+          <a:p>
+            <a:pPr algn="l">
+              <a:defRPr sz="2000" b="0">
+                <a:solidFill>
+                  <a:srgbClr val="222222"/>
+                </a:solidFill>
+                <a:latin typeface="Arial"/>
+              </a:defRPr>
+            </a:pPr>
+            <a:r>
+              <a:t>lesen</a:t>
+            </a:r>
+          </a:p>
+        </p:txBody>
+      </p:sp>
+      <p:sp>
+        <p:nvSpPr>
+          <p:cNvPr id="18" name="Rectangle 17"/>
+          <p:cNvSpPr/>
+          <p:nvPr/>
+        </p:nvSpPr>
+        <p:spPr>
+          <a:xfrm>
+            <a:off x="457200" y="3749039"/>
+            <a:ext cx="11274552" cy="594360"/>
+          </a:xfrm>
+          <a:prstGeom prst="rect">
+            <a:avLst/>
+          </a:prstGeom>
+          <a:solidFill>
+            <a:srgbClr val="F5F5F5"/>
+          </a:solidFill>
+          <a:ln>
+            <a:noFill/>
+          </a:ln>
+        </p:spPr>
+        <p:style>
+          <a:lnRef idx="1">
+            <a:schemeClr val="accent1"/>
+          </a:lnRef>
+          <a:fillRef idx="3">
+            <a:schemeClr val="accent1"/>
+          </a:fillRef>
+          <a:effectRef idx="2">
+            <a:schemeClr val="accent1"/>
+          </a:effectRef>
+          <a:fontRef idx="minor">
+            <a:schemeClr val="lt1"/>
+          </a:fontRef>
+        </p:style>
+        <p:txBody>
+          <a:bodyPr rtlCol="0" anchor="ctr"/>
+          <a:lstStyle/>
+          <a:p>
+            <a:pPr algn="ctr"/>
+          </a:p>
+        </p:txBody>
+      </p:sp>
+      <p:sp>
+        <p:nvSpPr>
+          <p:cNvPr id="19" name="TextBox 18"/>
+          <p:cNvSpPr txBox="1"/>
+          <p:nvPr/>
+        </p:nvSpPr>
+        <p:spPr>
+          <a:xfrm>
+            <a:off x="640080" y="3858768"/>
+            <a:ext cx="5029200" cy="365760"/>
+          </a:xfrm>
+          <a:prstGeom prst="rect">
+            <a:avLst/>
+          </a:prstGeom>
+          <a:noFill/>
+        </p:spPr>
+        <p:txBody>
+          <a:bodyPr wrap="none">
+            <a:spAutoFit/>
+          </a:bodyPr>
+          <a:lstStyle/>
+          <a:p>
+            <a:pPr algn="l">
+              <a:defRPr sz="2000" b="1">
+                <a:solidFill>
+                  <a:srgbClr val="C41E3A"/>
+                </a:solidFill>
+                <a:latin typeface="Arial"/>
+              </a:defRPr>
+            </a:pPr>
+            <a:r>
+              <a:t>comprender</a:t>
+            </a:r>
+          </a:p>
+        </p:txBody>
+      </p:sp>
+      <p:sp>
+        <p:nvSpPr>
+          <p:cNvPr id="20" name="TextBox 19"/>
+          <p:cNvSpPr txBox="1"/>
+          <p:nvPr/>
+        </p:nvSpPr>
+        <p:spPr>
+          <a:xfrm>
+            <a:off x="5943600" y="3858768"/>
+            <a:ext cx="5029200" cy="365760"/>
+          </a:xfrm>
+          <a:prstGeom prst="rect">
+            <a:avLst/>
+          </a:prstGeom>
+          <a:noFill/>
+        </p:spPr>
+        <p:txBody>
+          <a:bodyPr wrap="none">
+            <a:spAutoFit/>
+          </a:bodyPr>
+          <a:lstStyle/>
+          <a:p>
+            <a:pPr algn="l">
+              <a:defRPr sz="2000" b="0">
+                <a:solidFill>
+                  <a:srgbClr val="222222"/>
+                </a:solidFill>
+                <a:latin typeface="Arial"/>
+              </a:defRPr>
+            </a:pPr>
+            <a:r>
+              <a:t>verstehen</a:t>
+            </a:r>
+          </a:p>
+        </p:txBody>
+      </p:sp>
+      <p:sp>
+        <p:nvSpPr>
+          <p:cNvPr id="21" name="Rectangle 20"/>
+          <p:cNvSpPr/>
+          <p:nvPr/>
+        </p:nvSpPr>
+        <p:spPr>
+          <a:xfrm>
+            <a:off x="457200" y="5943600"/>
+            <a:ext cx="11274552" cy="548640"/>
+          </a:xfrm>
+          <a:prstGeom prst="rect">
+            <a:avLst/>
+          </a:prstGeom>
+          <a:solidFill>
+            <a:srgbClr val="FDF2F4"/>
+          </a:solidFill>
+          <a:ln>
+            <a:solidFill>
+              <a:srgbClr val="C41E3A"/>
+            </a:solidFill>
+          </a:ln>
+        </p:spPr>
+        <p:style>
+          <a:lnRef idx="1">
+            <a:schemeClr val="accent1"/>
+          </a:lnRef>
+          <a:fillRef idx="3">
+            <a:schemeClr val="accent1"/>
+          </a:fillRef>
+          <a:effectRef idx="2">
+            <a:schemeClr val="accent1"/>
+          </a:effectRef>
+          <a:fontRef idx="minor">
+            <a:schemeClr val="lt1"/>
+          </a:fontRef>
+        </p:style>
+        <p:txBody>
+          <a:bodyPr rtlCol="0" anchor="ctr"/>
+          <a:lstStyle/>
+          <a:p>
+            <a:pPr algn="ctr"/>
+          </a:p>
+        </p:txBody>
+      </p:sp>
+      <p:sp>
+        <p:nvSpPr>
+          <p:cNvPr id="22" name="TextBox 21"/>
+          <p:cNvSpPr txBox="1"/>
+          <p:nvPr/>
+        </p:nvSpPr>
+        <p:spPr>
+          <a:xfrm>
+            <a:off x="640080" y="6053328"/>
+            <a:ext cx="10972800" cy="365760"/>
+          </a:xfrm>
+          <a:prstGeom prst="rect">
+            <a:avLst/>
+          </a:prstGeom>
+          <a:noFill/>
+        </p:spPr>
+        <p:txBody>
+          <a:bodyPr wrap="none">
+            <a:spAutoFit/>
+          </a:bodyPr>
+          <a:lstStyle/>
+          <a:p>
+            <a:pPr algn="l">
+              <a:defRPr sz="1400" b="1">
+                <a:solidFill>
+                  <a:srgbClr val="C41E3A"/>
+                </a:solidFill>
+                <a:latin typeface="Arial"/>
+              </a:defRPr>
+            </a:pPr>
+            <a:r>
+              <a:t>📝 AB-05b: Kasten 1</a:t>
+            </a:r>
+          </a:p>
+        </p:txBody>
+      </p:sp>
+    </p:spTree>
+  </p:cSld>
+  <p:clrMapOvr>
+    <a:masterClrMapping/>
+  </p:clrMapOvr>
+</p:sld>
+</file>
+
+<file path=ppt/slides/slide9.xml><?xml version="1.0" encoding="utf-8"?>
+<p:sld xmlns:a="http://schemas.openxmlformats.org/drawingml/2006/main" xmlns:p="http://schemas.openxmlformats.org/presentationml/2006/main" xmlns:r="http://schemas.openxmlformats.org/officeDocument/2006/relationships">
+  <p:cSld>
+    <p:spTree>
+      <p:nvGrpSpPr>
+        <p:cNvPr id="1" name=""/>
+        <p:cNvGrpSpPr/>
+        <p:nvPr/>
+      </p:nvGrpSpPr>
+      <p:grpSpPr/>
+      <p:sp>
+        <p:nvSpPr>
+          <p:cNvPr id="2" name="Rectangle 1"/>
+          <p:cNvSpPr/>
+          <p:nvPr/>
+        </p:nvSpPr>
+        <p:spPr>
+          <a:xfrm>
+            <a:off x="0" y="0"/>
+            <a:ext cx="12191695" cy="457200"/>
+          </a:xfrm>
+          <a:prstGeom prst="rect">
+            <a:avLst/>
+          </a:prstGeom>
+          <a:solidFill>
+            <a:srgbClr val="C41E3A"/>
+          </a:solidFill>
+          <a:ln>
+            <a:noFill/>
+          </a:ln>
+        </p:spPr>
+        <p:style>
+          <a:lnRef idx="1">
+            <a:schemeClr val="accent1"/>
+          </a:lnRef>
+          <a:fillRef idx="3">
+            <a:schemeClr val="accent1"/>
+          </a:fillRef>
+          <a:effectRef idx="2">
+            <a:schemeClr val="accent1"/>
+          </a:effectRef>
+          <a:fontRef idx="minor">
+            <a:schemeClr val="lt1"/>
+          </a:fontRef>
+        </p:style>
+        <p:txBody>
+          <a:bodyPr rtlCol="0" anchor="ctr"/>
+          <a:lstStyle/>
+          <a:p>
+            <a:pPr algn="ctr"/>
+          </a:p>
+        </p:txBody>
+      </p:sp>
+      <p:sp>
+        <p:nvSpPr>
+          <p:cNvPr id="3" name="TextBox 2"/>
+          <p:cNvSpPr txBox="1"/>
+          <p:nvPr/>
+        </p:nvSpPr>
+        <p:spPr>
+          <a:xfrm>
+            <a:off x="274320" y="91440"/>
+            <a:ext cx="3657600" cy="274320"/>
+          </a:xfrm>
+          <a:prstGeom prst="rect">
+            <a:avLst/>
+          </a:prstGeom>
+          <a:noFill/>
+        </p:spPr>
+        <p:txBody>
+          <a:bodyPr wrap="none">
+            <a:spAutoFit/>
+          </a:bodyPr>
+          <a:lstStyle/>
+          <a:p>
+            <a:pPr algn="l">
+              <a:defRPr sz="1400" b="1">
+                <a:solidFill>
+                  <a:srgbClr val="FFFFFF"/>
+                </a:solidFill>
+                <a:latin typeface="Arial"/>
+              </a:defRPr>
+            </a:pPr>
+            <a:r>
+              <a:t>Spanisch Klasse 7 · LP-05b</a:t>
+            </a:r>
+          </a:p>
+        </p:txBody>
+      </p:sp>
+      <p:sp>
+        <p:nvSpPr>
+          <p:cNvPr id="4" name="Rectangle 3"/>
+          <p:cNvSpPr/>
+          <p:nvPr/>
+        </p:nvSpPr>
+        <p:spPr>
+          <a:xfrm>
+            <a:off x="0" y="6583680"/>
+            <a:ext cx="12191695" cy="274320"/>
+          </a:xfrm>
+          <a:prstGeom prst="rect">
+            <a:avLst/>
+          </a:prstGeom>
+          <a:solidFill>
+            <a:srgbClr val="F5F5F5"/>
+          </a:solidFill>
+          <a:ln>
+            <a:noFill/>
+          </a:ln>
+        </p:spPr>
+        <p:style>
+          <a:lnRef idx="1">
+            <a:schemeClr val="accent1"/>
+          </a:lnRef>
+          <a:fillRef idx="3">
+            <a:schemeClr val="accent1"/>
+          </a:fillRef>
+          <a:effectRef idx="2">
+            <a:schemeClr val="accent1"/>
+          </a:effectRef>
+          <a:fontRef idx="minor">
+            <a:schemeClr val="lt1"/>
+          </a:fontRef>
+        </p:style>
+        <p:txBody>
+          <a:bodyPr rtlCol="0" anchor="ctr"/>
+          <a:lstStyle/>
+          <a:p>
+            <a:pPr algn="ctr"/>
+          </a:p>
+        </p:txBody>
+      </p:sp>
+      <p:sp>
+        <p:nvSpPr>
+          <p:cNvPr id="5" name="TextBox 4"/>
+          <p:cNvSpPr txBox="1"/>
+          <p:nvPr/>
+        </p:nvSpPr>
+        <p:spPr>
+          <a:xfrm>
+            <a:off x="274320" y="6601968"/>
+            <a:ext cx="4572000" cy="228600"/>
+          </a:xfrm>
+          <a:prstGeom prst="rect">
+            <a:avLst/>
+          </a:prstGeom>
+          <a:noFill/>
+        </p:spPr>
+        <p:txBody>
+          <a:bodyPr wrap="none">
+            <a:spAutoFit/>
+          </a:bodyPr>
+          <a:lstStyle/>
+          <a:p>
+            <a:pPr algn="l">
+              <a:defRPr sz="1000" b="0">
+                <a:solidFill>
+                  <a:srgbClr val="555555"/>
+                </a:solidFill>
+                <a:latin typeface="Arial"/>
+              </a:defRPr>
+            </a:pPr>
+            <a:r>
+              <a:t>Verbos en -er/-ir</a:t>
+            </a:r>
+          </a:p>
+        </p:txBody>
+      </p:sp>
+      <p:sp>
+        <p:nvSpPr>
+          <p:cNvPr id="6" name="TextBox 5"/>
+          <p:cNvSpPr txBox="1"/>
+          <p:nvPr/>
+        </p:nvSpPr>
+        <p:spPr>
+          <a:xfrm>
+            <a:off x="9144000" y="6601968"/>
+            <a:ext cx="2743200" cy="228600"/>
+          </a:xfrm>
+          <a:prstGeom prst="rect">
+            <a:avLst/>
+          </a:prstGeom>
+          <a:noFill/>
+        </p:spPr>
+        <p:txBody>
+          <a:bodyPr wrap="none">
+            <a:spAutoFit/>
+          </a:bodyPr>
+          <a:lstStyle/>
+          <a:p>
+            <a:pPr algn="r">
+              <a:defRPr sz="1000" b="0">
+                <a:solidFill>
+                  <a:srgbClr val="555555"/>
+                </a:solidFill>
+                <a:latin typeface="Arial"/>
+              </a:defRPr>
+            </a:pPr>
+            <a:r>
+              <a:t>Sequenz 5</a:t>
+            </a:r>
+          </a:p>
+        </p:txBody>
+      </p:sp>
+      <p:sp>
+        <p:nvSpPr>
+          <p:cNvPr id="7" name="TextBox 6"/>
+          <p:cNvSpPr txBox="1"/>
+          <p:nvPr/>
+        </p:nvSpPr>
+        <p:spPr>
+          <a:xfrm>
+            <a:off x="457200" y="640080"/>
+            <a:ext cx="11274552" cy="731520"/>
+          </a:xfrm>
+          <a:prstGeom prst="rect">
+            <a:avLst/>
+          </a:prstGeom>
+          <a:noFill/>
+        </p:spPr>
+        <p:txBody>
+          <a:bodyPr wrap="none">
+            <a:spAutoFit/>
+          </a:bodyPr>
+          <a:lstStyle/>
+          <a:p>
+            <a:pPr algn="l">
+              <a:defRPr sz="3200" b="1">
+                <a:solidFill>
+                  <a:srgbClr val="C41E3A"/>
+                </a:solidFill>
+                <a:latin typeface="Arial"/>
+              </a:defRPr>
+            </a:pPr>
+            <a:r>
+              <a:t>📚 -ir-Verben</a:t>
+            </a:r>
+          </a:p>
+        </p:txBody>
+      </p:sp>
+      <p:sp>
+        <p:nvSpPr>
+          <p:cNvPr id="8" name="Rectangle 7"/>
+          <p:cNvSpPr/>
+          <p:nvPr/>
+        </p:nvSpPr>
+        <p:spPr>
+          <a:xfrm>
+            <a:off x="457200" y="1371600"/>
+            <a:ext cx="11274552" cy="594360"/>
+          </a:xfrm>
+          <a:prstGeom prst="rect">
+            <a:avLst/>
+          </a:prstGeom>
+          <a:solidFill>
+            <a:srgbClr val="C41E3A"/>
+          </a:solidFill>
+          <a:ln>
+            <a:noFill/>
+          </a:ln>
+        </p:spPr>
+        <p:style>
+          <a:lnRef idx="1">
+            <a:schemeClr val="accent1"/>
+          </a:lnRef>
+          <a:fillRef idx="3">
+            <a:schemeClr val="accent1"/>
+          </a:fillRef>
+          <a:effectRef idx="2">
+            <a:schemeClr val="accent1"/>
+          </a:effectRef>
+          <a:fontRef idx="minor">
+            <a:schemeClr val="lt1"/>
+          </a:fontRef>
+        </p:style>
+        <p:txBody>
+          <a:bodyPr rtlCol="0" anchor="ctr"/>
+          <a:lstStyle/>
+          <a:p>
+            <a:pPr algn="ctr"/>
+          </a:p>
+        </p:txBody>
+      </p:sp>
+      <p:sp>
+        <p:nvSpPr>
+          <p:cNvPr id="9" name="TextBox 8"/>
+          <p:cNvSpPr txBox="1"/>
+          <p:nvPr/>
+        </p:nvSpPr>
+        <p:spPr>
+          <a:xfrm>
+            <a:off x="640080" y="1481328"/>
+            <a:ext cx="5029200" cy="365760"/>
+          </a:xfrm>
+          <a:prstGeom prst="rect">
+            <a:avLst/>
+          </a:prstGeom>
+          <a:noFill/>
+        </p:spPr>
+        <p:txBody>
+          <a:bodyPr wrap="none">
+            <a:spAutoFit/>
+          </a:bodyPr>
+          <a:lstStyle/>
+          <a:p>
+            <a:pPr algn="l">
+              <a:defRPr sz="1800" b="1">
+                <a:solidFill>
+                  <a:srgbClr val="FFFFFF"/>
+                </a:solidFill>
+                <a:latin typeface="Arial"/>
+              </a:defRPr>
+            </a:pPr>
+            <a:r>
+              <a:t>Spanisch</a:t>
+            </a:r>
+          </a:p>
+        </p:txBody>
+      </p:sp>
+      <p:sp>
+        <p:nvSpPr>
+          <p:cNvPr id="10" name="TextBox 9"/>
+          <p:cNvSpPr txBox="1"/>
+          <p:nvPr/>
+        </p:nvSpPr>
+        <p:spPr>
+          <a:xfrm>
+            <a:off x="5943600" y="1481328"/>
+            <a:ext cx="5029200" cy="365760"/>
+          </a:xfrm>
+          <a:prstGeom prst="rect">
+            <a:avLst/>
+          </a:prstGeom>
+          <a:noFill/>
+        </p:spPr>
+        <p:txBody>
+          <a:bodyPr wrap="none">
+            <a:spAutoFit/>
+          </a:bodyPr>
+          <a:lstStyle/>
+          <a:p>
+            <a:pPr algn="l">
+              <a:defRPr sz="1800" b="1">
+                <a:solidFill>
+                  <a:srgbClr val="FFFFFF"/>
+                </a:solidFill>
+                <a:latin typeface="Arial"/>
+              </a:defRPr>
+            </a:pPr>
+            <a:r>
+              <a:t>Deutsch</a:t>
+            </a:r>
+          </a:p>
+        </p:txBody>
+      </p:sp>
+      <p:sp>
+        <p:nvSpPr>
+          <p:cNvPr id="11" name="TextBox 10"/>
+          <p:cNvSpPr txBox="1"/>
+          <p:nvPr/>
+        </p:nvSpPr>
+        <p:spPr>
+          <a:xfrm>
+            <a:off x="640080" y="2075688"/>
+            <a:ext cx="5029200" cy="365760"/>
+          </a:xfrm>
+          <a:prstGeom prst="rect">
+            <a:avLst/>
+          </a:prstGeom>
+          <a:noFill/>
+        </p:spPr>
+        <p:txBody>
+          <a:bodyPr wrap="none">
+            <a:spAutoFit/>
+          </a:bodyPr>
+          <a:lstStyle/>
+          <a:p>
+            <a:pPr algn="l">
+              <a:defRPr sz="2000" b="1">
+                <a:solidFill>
+                  <a:srgbClr val="C41E3A"/>
+                </a:solidFill>
+                <a:latin typeface="Arial"/>
+              </a:defRPr>
+            </a:pPr>
+            <a:r>
+              <a:t>vivir</a:t>
             </a:r>
           </a:p>
         </p:txBody>
@@ -5281,22 +10077,405 @@
         </p:nvSpPr>
         <p:spPr>
           <a:xfrm>
-            <a:off x="457200" y="5760720"/>
+            <a:off x="5943600" y="2075688"/>
+            <a:ext cx="5029200" cy="365760"/>
+          </a:xfrm>
+          <a:prstGeom prst="rect">
+            <a:avLst/>
+          </a:prstGeom>
+          <a:noFill/>
+        </p:spPr>
+        <p:txBody>
+          <a:bodyPr wrap="none">
+            <a:spAutoFit/>
+          </a:bodyPr>
+          <a:lstStyle/>
+          <a:p>
+            <a:pPr algn="l">
+              <a:defRPr sz="2000" b="0">
+                <a:solidFill>
+                  <a:srgbClr val="222222"/>
+                </a:solidFill>
+                <a:latin typeface="Arial"/>
+              </a:defRPr>
+            </a:pPr>
+            <a:r>
+              <a:t>leben, wohnen</a:t>
+            </a:r>
+          </a:p>
+        </p:txBody>
+      </p:sp>
+      <p:sp>
+        <p:nvSpPr>
+          <p:cNvPr id="13" name="Rectangle 12"/>
+          <p:cNvSpPr/>
+          <p:nvPr/>
+        </p:nvSpPr>
+        <p:spPr>
+          <a:xfrm>
+            <a:off x="457200" y="2560320"/>
+            <a:ext cx="11274552" cy="594360"/>
+          </a:xfrm>
+          <a:prstGeom prst="rect">
+            <a:avLst/>
+          </a:prstGeom>
+          <a:solidFill>
+            <a:srgbClr val="F5F5F5"/>
+          </a:solidFill>
+          <a:ln>
+            <a:noFill/>
+          </a:ln>
+        </p:spPr>
+        <p:style>
+          <a:lnRef idx="1">
+            <a:schemeClr val="accent1"/>
+          </a:lnRef>
+          <a:fillRef idx="3">
+            <a:schemeClr val="accent1"/>
+          </a:fillRef>
+          <a:effectRef idx="2">
+            <a:schemeClr val="accent1"/>
+          </a:effectRef>
+          <a:fontRef idx="minor">
+            <a:schemeClr val="lt1"/>
+          </a:fontRef>
+        </p:style>
+        <p:txBody>
+          <a:bodyPr rtlCol="0" anchor="ctr"/>
+          <a:lstStyle/>
+          <a:p>
+            <a:pPr algn="ctr"/>
+          </a:p>
+        </p:txBody>
+      </p:sp>
+      <p:sp>
+        <p:nvSpPr>
+          <p:cNvPr id="14" name="TextBox 13"/>
+          <p:cNvSpPr txBox="1"/>
+          <p:nvPr/>
+        </p:nvSpPr>
+        <p:spPr>
+          <a:xfrm>
+            <a:off x="640080" y="2670048"/>
+            <a:ext cx="5029200" cy="365760"/>
+          </a:xfrm>
+          <a:prstGeom prst="rect">
+            <a:avLst/>
+          </a:prstGeom>
+          <a:noFill/>
+        </p:spPr>
+        <p:txBody>
+          <a:bodyPr wrap="none">
+            <a:spAutoFit/>
+          </a:bodyPr>
+          <a:lstStyle/>
+          <a:p>
+            <a:pPr algn="l">
+              <a:defRPr sz="2000" b="1">
+                <a:solidFill>
+                  <a:srgbClr val="C41E3A"/>
+                </a:solidFill>
+                <a:latin typeface="Arial"/>
+              </a:defRPr>
+            </a:pPr>
+            <a:r>
+              <a:t>escribir</a:t>
+            </a:r>
+          </a:p>
+        </p:txBody>
+      </p:sp>
+      <p:sp>
+        <p:nvSpPr>
+          <p:cNvPr id="15" name="TextBox 14"/>
+          <p:cNvSpPr txBox="1"/>
+          <p:nvPr/>
+        </p:nvSpPr>
+        <p:spPr>
+          <a:xfrm>
+            <a:off x="5943600" y="2670048"/>
+            <a:ext cx="5029200" cy="365760"/>
+          </a:xfrm>
+          <a:prstGeom prst="rect">
+            <a:avLst/>
+          </a:prstGeom>
+          <a:noFill/>
+        </p:spPr>
+        <p:txBody>
+          <a:bodyPr wrap="none">
+            <a:spAutoFit/>
+          </a:bodyPr>
+          <a:lstStyle/>
+          <a:p>
+            <a:pPr algn="l">
+              <a:defRPr sz="2000" b="0">
+                <a:solidFill>
+                  <a:srgbClr val="222222"/>
+                </a:solidFill>
+                <a:latin typeface="Arial"/>
+              </a:defRPr>
+            </a:pPr>
+            <a:r>
+              <a:t>schreiben</a:t>
+            </a:r>
+          </a:p>
+        </p:txBody>
+      </p:sp>
+      <p:sp>
+        <p:nvSpPr>
+          <p:cNvPr id="16" name="TextBox 15"/>
+          <p:cNvSpPr txBox="1"/>
+          <p:nvPr/>
+        </p:nvSpPr>
+        <p:spPr>
+          <a:xfrm>
+            <a:off x="640080" y="3264408"/>
+            <a:ext cx="5029200" cy="365760"/>
+          </a:xfrm>
+          <a:prstGeom prst="rect">
+            <a:avLst/>
+          </a:prstGeom>
+          <a:noFill/>
+        </p:spPr>
+        <p:txBody>
+          <a:bodyPr wrap="none">
+            <a:spAutoFit/>
+          </a:bodyPr>
+          <a:lstStyle/>
+          <a:p>
+            <a:pPr algn="l">
+              <a:defRPr sz="2000" b="1">
+                <a:solidFill>
+                  <a:srgbClr val="C41E3A"/>
+                </a:solidFill>
+                <a:latin typeface="Arial"/>
+              </a:defRPr>
+            </a:pPr>
+            <a:r>
+              <a:t>abrir</a:t>
+            </a:r>
+          </a:p>
+        </p:txBody>
+      </p:sp>
+      <p:sp>
+        <p:nvSpPr>
+          <p:cNvPr id="17" name="TextBox 16"/>
+          <p:cNvSpPr txBox="1"/>
+          <p:nvPr/>
+        </p:nvSpPr>
+        <p:spPr>
+          <a:xfrm>
+            <a:off x="5943600" y="3264408"/>
+            <a:ext cx="5029200" cy="365760"/>
+          </a:xfrm>
+          <a:prstGeom prst="rect">
+            <a:avLst/>
+          </a:prstGeom>
+          <a:noFill/>
+        </p:spPr>
+        <p:txBody>
+          <a:bodyPr wrap="none">
+            <a:spAutoFit/>
+          </a:bodyPr>
+          <a:lstStyle/>
+          <a:p>
+            <a:pPr algn="l">
+              <a:defRPr sz="2000" b="0">
+                <a:solidFill>
+                  <a:srgbClr val="222222"/>
+                </a:solidFill>
+                <a:latin typeface="Arial"/>
+              </a:defRPr>
+            </a:pPr>
+            <a:r>
+              <a:t>öffnen</a:t>
+            </a:r>
+          </a:p>
+        </p:txBody>
+      </p:sp>
+      <p:sp>
+        <p:nvSpPr>
+          <p:cNvPr id="18" name="Rectangle 17"/>
+          <p:cNvSpPr/>
+          <p:nvPr/>
+        </p:nvSpPr>
+        <p:spPr>
+          <a:xfrm>
+            <a:off x="457200" y="3749039"/>
+            <a:ext cx="11274552" cy="594360"/>
+          </a:xfrm>
+          <a:prstGeom prst="rect">
+            <a:avLst/>
+          </a:prstGeom>
+          <a:solidFill>
+            <a:srgbClr val="F5F5F5"/>
+          </a:solidFill>
+          <a:ln>
+            <a:noFill/>
+          </a:ln>
+        </p:spPr>
+        <p:style>
+          <a:lnRef idx="1">
+            <a:schemeClr val="accent1"/>
+          </a:lnRef>
+          <a:fillRef idx="3">
+            <a:schemeClr val="accent1"/>
+          </a:fillRef>
+          <a:effectRef idx="2">
+            <a:schemeClr val="accent1"/>
+          </a:effectRef>
+          <a:fontRef idx="minor">
+            <a:schemeClr val="lt1"/>
+          </a:fontRef>
+        </p:style>
+        <p:txBody>
+          <a:bodyPr rtlCol="0" anchor="ctr"/>
+          <a:lstStyle/>
+          <a:p>
+            <a:pPr algn="ctr"/>
+          </a:p>
+        </p:txBody>
+      </p:sp>
+      <p:sp>
+        <p:nvSpPr>
+          <p:cNvPr id="19" name="TextBox 18"/>
+          <p:cNvSpPr txBox="1"/>
+          <p:nvPr/>
+        </p:nvSpPr>
+        <p:spPr>
+          <a:xfrm>
+            <a:off x="640080" y="3858768"/>
+            <a:ext cx="5029200" cy="365760"/>
+          </a:xfrm>
+          <a:prstGeom prst="rect">
+            <a:avLst/>
+          </a:prstGeom>
+          <a:noFill/>
+        </p:spPr>
+        <p:txBody>
+          <a:bodyPr wrap="none">
+            <a:spAutoFit/>
+          </a:bodyPr>
+          <a:lstStyle/>
+          <a:p>
+            <a:pPr algn="l">
+              <a:defRPr sz="2000" b="1">
+                <a:solidFill>
+                  <a:srgbClr val="C41E3A"/>
+                </a:solidFill>
+                <a:latin typeface="Arial"/>
+              </a:defRPr>
+            </a:pPr>
+            <a:r>
+              <a:t>subir</a:t>
+            </a:r>
+          </a:p>
+        </p:txBody>
+      </p:sp>
+      <p:sp>
+        <p:nvSpPr>
+          <p:cNvPr id="20" name="TextBox 19"/>
+          <p:cNvSpPr txBox="1"/>
+          <p:nvPr/>
+        </p:nvSpPr>
+        <p:spPr>
+          <a:xfrm>
+            <a:off x="5943600" y="3858768"/>
+            <a:ext cx="5029200" cy="365760"/>
+          </a:xfrm>
+          <a:prstGeom prst="rect">
+            <a:avLst/>
+          </a:prstGeom>
+          <a:noFill/>
+        </p:spPr>
+        <p:txBody>
+          <a:bodyPr wrap="none">
+            <a:spAutoFit/>
+          </a:bodyPr>
+          <a:lstStyle/>
+          <a:p>
+            <a:pPr algn="l">
+              <a:defRPr sz="2000" b="0">
+                <a:solidFill>
+                  <a:srgbClr val="222222"/>
+                </a:solidFill>
+                <a:latin typeface="Arial"/>
+              </a:defRPr>
+            </a:pPr>
+            <a:r>
+              <a:t>hochgehen</a:t>
+            </a:r>
+          </a:p>
+        </p:txBody>
+      </p:sp>
+      <p:sp>
+        <p:nvSpPr>
+          <p:cNvPr id="21" name="Rectangle 20"/>
+          <p:cNvSpPr/>
+          <p:nvPr/>
+        </p:nvSpPr>
+        <p:spPr>
+          <a:xfrm>
+            <a:off x="457200" y="5943600"/>
             <a:ext cx="11274552" cy="548640"/>
           </a:xfrm>
           <a:prstGeom prst="rect">
             <a:avLst/>
           </a:prstGeom>
-          <a:noFill/>
-        </p:spPr>
-        <p:txBody>
-          <a:bodyPr wrap="none">
-            <a:spAutoFit/>
-          </a:bodyPr>
-          <a:lstStyle/>
-          <a:p>
-            <a:pPr algn="ctr">
-              <a:defRPr sz="3200" b="1">
+          <a:solidFill>
+            <a:srgbClr val="FDF2F4"/>
+          </a:solidFill>
+          <a:ln>
+            <a:solidFill>
+              <a:srgbClr val="C41E3A"/>
+            </a:solidFill>
+          </a:ln>
+        </p:spPr>
+        <p:style>
+          <a:lnRef idx="1">
+            <a:schemeClr val="accent1"/>
+          </a:lnRef>
+          <a:fillRef idx="3">
+            <a:schemeClr val="accent1"/>
+          </a:fillRef>
+          <a:effectRef idx="2">
+            <a:schemeClr val="accent1"/>
+          </a:effectRef>
+          <a:fontRef idx="minor">
+            <a:schemeClr val="lt1"/>
+          </a:fontRef>
+        </p:style>
+        <p:txBody>
+          <a:bodyPr rtlCol="0" anchor="ctr"/>
+          <a:lstStyle/>
+          <a:p>
+            <a:pPr algn="ctr"/>
+          </a:p>
+        </p:txBody>
+      </p:sp>
+      <p:sp>
+        <p:nvSpPr>
+          <p:cNvPr id="22" name="TextBox 21"/>
+          <p:cNvSpPr txBox="1"/>
+          <p:nvPr/>
+        </p:nvSpPr>
+        <p:spPr>
+          <a:xfrm>
+            <a:off x="640080" y="6053328"/>
+            <a:ext cx="10972800" cy="365760"/>
+          </a:xfrm>
+          <a:prstGeom prst="rect">
+            <a:avLst/>
+          </a:prstGeom>
+          <a:noFill/>
+        </p:spPr>
+        <p:txBody>
+          <a:bodyPr wrap="none">
+            <a:spAutoFit/>
+          </a:bodyPr>
+          <a:lstStyle/>
+          <a:p>
+            <a:pPr algn="l">
+              <a:defRPr sz="1400" b="1">
                 <a:solidFill>
                   <a:srgbClr val="C41E3A"/>
                 </a:solidFill>
@@ -5304,7 +10483,7 @@
               </a:defRPr>
             </a:pPr>
             <a:r>
-              <a:t>¡Hasta luego!</a:t>
+              <a:t>📝 AB-05b: Kasten 1</a:t>
             </a:r>
           </a:p>
         </p:txBody>
